--- a/ValueCard/ValueCardPoker.pptx
+++ b/ValueCard/ValueCardPoker.pptx
@@ -5,7 +5,7 @@
     <p:sldMasterId id="2147483661" r:id="rId1"/>
   </p:sldMasterIdLst>
   <p:notesMasterIdLst>
-    <p:notesMasterId r:id="rId13"/>
+    <p:notesMasterId r:id="rId17"/>
   </p:notesMasterIdLst>
   <p:sldIdLst>
     <p:sldId id="256" r:id="rId2"/>
@@ -15,10 +15,14 @@
     <p:sldId id="263" r:id="rId6"/>
     <p:sldId id="264" r:id="rId7"/>
     <p:sldId id="267" r:id="rId8"/>
-    <p:sldId id="265" r:id="rId9"/>
-    <p:sldId id="266" r:id="rId10"/>
-    <p:sldId id="261" r:id="rId11"/>
-    <p:sldId id="259" r:id="rId12"/>
+    <p:sldId id="268" r:id="rId9"/>
+    <p:sldId id="269" r:id="rId10"/>
+    <p:sldId id="270" r:id="rId11"/>
+    <p:sldId id="271" r:id="rId12"/>
+    <p:sldId id="265" r:id="rId13"/>
+    <p:sldId id="266" r:id="rId14"/>
+    <p:sldId id="261" r:id="rId15"/>
+    <p:sldId id="259" r:id="rId16"/>
   </p:sldIdLst>
   <p:sldSz cx="12192000" cy="6858000"/>
   <p:notesSz cx="6858000" cy="9144000"/>
@@ -218,7 +222,7 @@
           <a:p>
             <a:fld id="{8195631E-6B12-43E3-8BD8-22B72CF3F4B6}" type="datetimeFigureOut">
               <a:rPr kumimoji="1" lang="ja-JP" altLang="en-US" smtClean="0"/>
-              <a:t>2025/6/11</a:t>
+              <a:t>2026/1/27</a:t>
             </a:fld>
             <a:endParaRPr kumimoji="1" lang="ja-JP" altLang="en-US"/>
           </a:p>
@@ -748,7 +752,7 @@
           <a:p>
             <a:fld id="{9D1112B5-5034-40E3-B591-E9E2AE86CBF5}" type="datetimeFigureOut">
               <a:rPr kumimoji="1" lang="ja-JP" altLang="en-US" smtClean="0"/>
-              <a:t>2025/6/11</a:t>
+              <a:t>2026/1/27</a:t>
             </a:fld>
             <a:endParaRPr kumimoji="1" lang="ja-JP" altLang="en-US"/>
           </a:p>
@@ -978,7 +982,7 @@
           <a:p>
             <a:fld id="{9D1112B5-5034-40E3-B591-E9E2AE86CBF5}" type="datetimeFigureOut">
               <a:rPr kumimoji="1" lang="ja-JP" altLang="en-US" smtClean="0"/>
-              <a:t>2025/6/11</a:t>
+              <a:t>2026/1/27</a:t>
             </a:fld>
             <a:endParaRPr kumimoji="1" lang="ja-JP" altLang="en-US"/>
           </a:p>
@@ -1218,7 +1222,7 @@
           <a:p>
             <a:fld id="{9D1112B5-5034-40E3-B591-E9E2AE86CBF5}" type="datetimeFigureOut">
               <a:rPr kumimoji="1" lang="ja-JP" altLang="en-US" smtClean="0"/>
-              <a:t>2025/6/11</a:t>
+              <a:t>2026/1/27</a:t>
             </a:fld>
             <a:endParaRPr kumimoji="1" lang="ja-JP" altLang="en-US"/>
           </a:p>
@@ -1448,7 +1452,7 @@
           <a:p>
             <a:fld id="{9D1112B5-5034-40E3-B591-E9E2AE86CBF5}" type="datetimeFigureOut">
               <a:rPr kumimoji="1" lang="ja-JP" altLang="en-US" smtClean="0"/>
-              <a:t>2025/6/11</a:t>
+              <a:t>2026/1/27</a:t>
             </a:fld>
             <a:endParaRPr kumimoji="1" lang="ja-JP" altLang="en-US"/>
           </a:p>
@@ -1723,7 +1727,7 @@
           <a:p>
             <a:fld id="{9D1112B5-5034-40E3-B591-E9E2AE86CBF5}" type="datetimeFigureOut">
               <a:rPr kumimoji="1" lang="ja-JP" altLang="en-US" smtClean="0"/>
-              <a:t>2025/6/11</a:t>
+              <a:t>2026/1/27</a:t>
             </a:fld>
             <a:endParaRPr kumimoji="1" lang="ja-JP" altLang="en-US"/>
           </a:p>
@@ -2052,7 +2056,7 @@
           <a:p>
             <a:fld id="{9D1112B5-5034-40E3-B591-E9E2AE86CBF5}" type="datetimeFigureOut">
               <a:rPr kumimoji="1" lang="ja-JP" altLang="en-US" smtClean="0"/>
-              <a:t>2025/6/11</a:t>
+              <a:t>2026/1/27</a:t>
             </a:fld>
             <a:endParaRPr kumimoji="1" lang="ja-JP" altLang="en-US"/>
           </a:p>
@@ -2528,7 +2532,7 @@
           <a:p>
             <a:fld id="{9D1112B5-5034-40E3-B591-E9E2AE86CBF5}" type="datetimeFigureOut">
               <a:rPr kumimoji="1" lang="ja-JP" altLang="en-US" smtClean="0"/>
-              <a:t>2025/6/11</a:t>
+              <a:t>2026/1/27</a:t>
             </a:fld>
             <a:endParaRPr kumimoji="1" lang="ja-JP" altLang="en-US"/>
           </a:p>
@@ -2669,7 +2673,7 @@
           <a:p>
             <a:fld id="{9D1112B5-5034-40E3-B591-E9E2AE86CBF5}" type="datetimeFigureOut">
               <a:rPr kumimoji="1" lang="ja-JP" altLang="en-US" smtClean="0"/>
-              <a:t>2025/6/11</a:t>
+              <a:t>2026/1/27</a:t>
             </a:fld>
             <a:endParaRPr kumimoji="1" lang="ja-JP" altLang="en-US"/>
           </a:p>
@@ -2782,7 +2786,7 @@
           <a:p>
             <a:fld id="{9D1112B5-5034-40E3-B591-E9E2AE86CBF5}" type="datetimeFigureOut">
               <a:rPr kumimoji="1" lang="ja-JP" altLang="en-US" smtClean="0"/>
-              <a:t>2025/6/11</a:t>
+              <a:t>2026/1/27</a:t>
             </a:fld>
             <a:endParaRPr kumimoji="1" lang="ja-JP" altLang="en-US"/>
           </a:p>
@@ -3125,7 +3129,7 @@
           <a:p>
             <a:fld id="{9D1112B5-5034-40E3-B591-E9E2AE86CBF5}" type="datetimeFigureOut">
               <a:rPr kumimoji="1" lang="ja-JP" altLang="en-US" smtClean="0"/>
-              <a:t>2025/6/11</a:t>
+              <a:t>2026/1/27</a:t>
             </a:fld>
             <a:endParaRPr kumimoji="1" lang="ja-JP" altLang="en-US"/>
           </a:p>
@@ -3413,7 +3417,7 @@
           <a:p>
             <a:fld id="{9D1112B5-5034-40E3-B591-E9E2AE86CBF5}" type="datetimeFigureOut">
               <a:rPr kumimoji="1" lang="ja-JP" altLang="en-US" smtClean="0"/>
-              <a:t>2025/6/11</a:t>
+              <a:t>2026/1/27</a:t>
             </a:fld>
             <a:endParaRPr kumimoji="1" lang="ja-JP" altLang="en-US"/>
           </a:p>
@@ -3686,7 +3690,7 @@
           <a:p>
             <a:fld id="{9D1112B5-5034-40E3-B591-E9E2AE86CBF5}" type="datetimeFigureOut">
               <a:rPr kumimoji="1" lang="ja-JP" altLang="en-US" smtClean="0"/>
-              <a:t>2025/6/11</a:t>
+              <a:t>2026/1/27</a:t>
             </a:fld>
             <a:endParaRPr kumimoji="1" lang="ja-JP" altLang="en-US"/>
           </a:p>
@@ -4404,6 +4408,250 @@
 </file>
 
 <file path=ppt/slides/slide10.xml><?xml version="1.0" encoding="utf-8"?>
+<p:sld xmlns:a="http://schemas.openxmlformats.org/drawingml/2006/main" xmlns:r="http://schemas.openxmlformats.org/officeDocument/2006/relationships" xmlns:p="http://schemas.openxmlformats.org/presentationml/2006/main">
+  <p:cSld>
+    <p:spTree>
+      <p:nvGrpSpPr>
+        <p:cNvPr id="1" name="">
+          <a:extLst>
+            <a:ext uri="{FF2B5EF4-FFF2-40B4-BE49-F238E27FC236}">
+              <a16:creationId xmlns:a16="http://schemas.microsoft.com/office/drawing/2014/main" id="{3851E5E6-FB01-CB8E-9FF3-0D0FC5985543}"/>
+            </a:ext>
+          </a:extLst>
+        </p:cNvPr>
+        <p:cNvGrpSpPr/>
+        <p:nvPr/>
+      </p:nvGrpSpPr>
+      <p:grpSpPr>
+        <a:xfrm>
+          <a:off x="0" y="0"/>
+          <a:ext cx="0" cy="0"/>
+          <a:chOff x="0" y="0"/>
+          <a:chExt cx="0" cy="0"/>
+        </a:xfrm>
+      </p:grpSpPr>
+      <p:sp>
+        <p:nvSpPr>
+          <p:cNvPr id="2" name="タイトル 1">
+            <a:extLst>
+              <a:ext uri="{FF2B5EF4-FFF2-40B4-BE49-F238E27FC236}">
+                <a16:creationId xmlns:a16="http://schemas.microsoft.com/office/drawing/2014/main" id="{E3C919DC-5EE0-8A0A-0FC6-050111204906}"/>
+              </a:ext>
+            </a:extLst>
+          </p:cNvPr>
+          <p:cNvSpPr>
+            <a:spLocks noGrp="1"/>
+          </p:cNvSpPr>
+          <p:nvPr>
+            <p:ph type="title"/>
+          </p:nvPr>
+        </p:nvSpPr>
+        <p:spPr>
+          <a:xfrm>
+            <a:off x="838200" y="365127"/>
+            <a:ext cx="6193904" cy="759618"/>
+          </a:xfrm>
+        </p:spPr>
+        <p:txBody>
+          <a:bodyPr/>
+          <a:lstStyle/>
+          <a:p>
+            <a:r>
+              <a:rPr kumimoji="1" lang="ja-JP" altLang="en-US" dirty="0"/>
+              <a:t>まとめ</a:t>
+            </a:r>
+          </a:p>
+        </p:txBody>
+      </p:sp>
+      <p:sp>
+        <p:nvSpPr>
+          <p:cNvPr id="5" name="コンテンツ プレースホルダー 4">
+            <a:extLst>
+              <a:ext uri="{FF2B5EF4-FFF2-40B4-BE49-F238E27FC236}">
+                <a16:creationId xmlns:a16="http://schemas.microsoft.com/office/drawing/2014/main" id="{076DA80B-CD96-462D-5628-84068E2441AD}"/>
+              </a:ext>
+            </a:extLst>
+          </p:cNvPr>
+          <p:cNvSpPr>
+            <a:spLocks noGrp="1"/>
+          </p:cNvSpPr>
+          <p:nvPr>
+            <p:ph idx="1"/>
+          </p:nvPr>
+        </p:nvSpPr>
+        <p:spPr>
+          <a:xfrm>
+            <a:off x="838200" y="1556792"/>
+            <a:ext cx="10515600" cy="4351338"/>
+          </a:xfrm>
+        </p:spPr>
+        <p:txBody>
+          <a:bodyPr/>
+          <a:lstStyle/>
+          <a:p>
+            <a:r>
+              <a:rPr lang="en-US" altLang="ja-JP" dirty="0" err="1"/>
+              <a:t>ValueCard</a:t>
+            </a:r>
+            <a:r>
+              <a:rPr lang="en-US" altLang="ja-JP" dirty="0"/>
+              <a:t> Poker</a:t>
+            </a:r>
+            <a:r>
+              <a:rPr lang="ja-JP" altLang="en-US" dirty="0"/>
+              <a:t>の紹介</a:t>
+            </a:r>
+            <a:endParaRPr lang="en-US" altLang="ja-JP" dirty="0"/>
+          </a:p>
+          <a:p>
+            <a:pPr lvl="1"/>
+            <a:r>
+              <a:rPr lang="ja-JP" altLang="en-US" dirty="0"/>
+              <a:t>やる意義</a:t>
+            </a:r>
+            <a:endParaRPr lang="en-US" altLang="ja-JP" dirty="0"/>
+          </a:p>
+          <a:p>
+            <a:pPr lvl="1"/>
+            <a:r>
+              <a:rPr lang="ja-JP" altLang="en-US" dirty="0"/>
+              <a:t>進め方</a:t>
+            </a:r>
+            <a:endParaRPr lang="en-US" altLang="ja-JP" dirty="0"/>
+          </a:p>
+          <a:p>
+            <a:pPr lvl="1"/>
+            <a:r>
+              <a:rPr lang="ja-JP" altLang="en-US" dirty="0"/>
+              <a:t>オンラインを使ったデモ</a:t>
+            </a:r>
+            <a:endParaRPr lang="en-US" altLang="ja-JP" dirty="0"/>
+          </a:p>
+          <a:p>
+            <a:pPr lvl="1"/>
+            <a:endParaRPr lang="en-US" altLang="ja-JP" dirty="0"/>
+          </a:p>
+          <a:p>
+            <a:r>
+              <a:rPr lang="en-US" altLang="ja-JP" dirty="0" err="1"/>
+              <a:t>ValueCard</a:t>
+            </a:r>
+            <a:r>
+              <a:rPr lang="ja-JP" altLang="en-US" dirty="0"/>
+              <a:t>のもとになったシュワルツの価値理論の紹介</a:t>
+            </a:r>
+            <a:endParaRPr lang="en-US" altLang="ja-JP" dirty="0"/>
+          </a:p>
+          <a:p>
+            <a:pPr lvl="1"/>
+            <a:r>
+              <a:rPr lang="ja-JP" altLang="en-US" dirty="0"/>
+              <a:t>さわりだけ</a:t>
+            </a:r>
+            <a:endParaRPr lang="en-US" altLang="ja-JP" dirty="0"/>
+          </a:p>
+          <a:p>
+            <a:pPr lvl="1"/>
+            <a:endParaRPr lang="en-US" altLang="ja-JP" dirty="0"/>
+          </a:p>
+          <a:p>
+            <a:r>
+              <a:rPr lang="ja-JP" altLang="en-US" dirty="0"/>
+              <a:t>上記をつうじた 加藤のひととなりの紹介 </a:t>
+            </a:r>
+            <a:r>
+              <a:rPr lang="ja-JP" altLang="en-US" sz="2000" dirty="0"/>
+              <a:t>になっていれば幸いです</a:t>
+            </a:r>
+            <a:endParaRPr lang="en-US" altLang="ja-JP" sz="2000" dirty="0"/>
+          </a:p>
+        </p:txBody>
+      </p:sp>
+    </p:spTree>
+    <p:extLst>
+      <p:ext uri="{BB962C8B-B14F-4D97-AF65-F5344CB8AC3E}">
+        <p14:creationId xmlns:p14="http://schemas.microsoft.com/office/powerpoint/2010/main" val="2735129970"/>
+      </p:ext>
+    </p:extLst>
+  </p:cSld>
+  <p:clrMapOvr>
+    <a:masterClrMapping/>
+  </p:clrMapOvr>
+</p:sld>
+</file>
+
+<file path=ppt/slides/slide11.xml><?xml version="1.0" encoding="utf-8"?>
+<p:sld xmlns:a="http://schemas.openxmlformats.org/drawingml/2006/main" xmlns:r="http://schemas.openxmlformats.org/officeDocument/2006/relationships" xmlns:p="http://schemas.openxmlformats.org/presentationml/2006/main">
+  <p:cSld>
+    <p:spTree>
+      <p:nvGrpSpPr>
+        <p:cNvPr id="1" name="">
+          <a:extLst>
+            <a:ext uri="{FF2B5EF4-FFF2-40B4-BE49-F238E27FC236}">
+              <a16:creationId xmlns:a16="http://schemas.microsoft.com/office/drawing/2014/main" id="{F4C6CFBA-A510-4A02-DC8D-4E16770F73D8}"/>
+            </a:ext>
+          </a:extLst>
+        </p:cNvPr>
+        <p:cNvGrpSpPr/>
+        <p:nvPr/>
+      </p:nvGrpSpPr>
+      <p:grpSpPr>
+        <a:xfrm>
+          <a:off x="0" y="0"/>
+          <a:ext cx="0" cy="0"/>
+          <a:chOff x="0" y="0"/>
+          <a:chExt cx="0" cy="0"/>
+        </a:xfrm>
+      </p:grpSpPr>
+      <p:sp>
+        <p:nvSpPr>
+          <p:cNvPr id="2" name="タイトル 1">
+            <a:extLst>
+              <a:ext uri="{FF2B5EF4-FFF2-40B4-BE49-F238E27FC236}">
+                <a16:creationId xmlns:a16="http://schemas.microsoft.com/office/drawing/2014/main" id="{FBADA163-3FF0-B7BD-C62D-9CA99ACE2540}"/>
+              </a:ext>
+            </a:extLst>
+          </p:cNvPr>
+          <p:cNvSpPr>
+            <a:spLocks noGrp="1"/>
+          </p:cNvSpPr>
+          <p:nvPr>
+            <p:ph type="title"/>
+          </p:nvPr>
+        </p:nvSpPr>
+        <p:spPr>
+          <a:xfrm>
+            <a:off x="838200" y="365126"/>
+            <a:ext cx="9290248" cy="1191665"/>
+          </a:xfrm>
+        </p:spPr>
+        <p:txBody>
+          <a:bodyPr>
+            <a:normAutofit/>
+          </a:bodyPr>
+          <a:lstStyle/>
+          <a:p>
+            <a:r>
+              <a:rPr kumimoji="1" lang="ja-JP" altLang="en-US" dirty="0"/>
+              <a:t>どうもありがとうございました！</a:t>
+            </a:r>
+          </a:p>
+        </p:txBody>
+      </p:sp>
+    </p:spTree>
+    <p:extLst>
+      <p:ext uri="{BB962C8B-B14F-4D97-AF65-F5344CB8AC3E}">
+        <p14:creationId xmlns:p14="http://schemas.microsoft.com/office/powerpoint/2010/main" val="3315396825"/>
+      </p:ext>
+    </p:extLst>
+  </p:cSld>
+  <p:clrMapOvr>
+    <a:masterClrMapping/>
+  </p:clrMapOvr>
+</p:sld>
+</file>
+
+<file path=ppt/slides/slide12.xml><?xml version="1.0" encoding="utf-8"?>
 <p:sld xmlns:a="http://schemas.openxmlformats.org/drawingml/2006/main" xmlns:r="http://schemas.openxmlformats.org/officeDocument/2006/relationships" xmlns:p="http://schemas.openxmlformats.org/presentationml/2006/main" show="0">
   <p:cSld>
     <p:spTree>
@@ -4462,10 +4710,10 @@
               <a:buNone/>
             </a:pPr>
             <a:r>
-              <a:rPr kumimoji="1" lang="ja-JP" altLang="en-US" dirty="0"/>
-              <a:t>私の仕事に対するモティベーション</a:t>
-            </a:r>
-            <a:endParaRPr kumimoji="1" lang="en-US" altLang="ja-JP" dirty="0"/>
+              <a:rPr lang="ja-JP" altLang="en-US" dirty="0"/>
+              <a:t>まず、今までで一番テンションあがった案件・テーマ・プロジェクトを思い起こしてみましょう。</a:t>
+            </a:r>
+            <a:endParaRPr lang="en-US" altLang="ja-JP" dirty="0"/>
           </a:p>
           <a:p>
             <a:pPr marL="0" indent="0" algn="ctr">
@@ -4502,7 +4750,257 @@
 </p:sld>
 </file>
 
-<file path=ppt/slides/slide11.xml><?xml version="1.0" encoding="utf-8"?>
+<file path=ppt/slides/slide13.xml><?xml version="1.0" encoding="utf-8"?>
+<p:sld xmlns:a="http://schemas.openxmlformats.org/drawingml/2006/main" xmlns:r="http://schemas.openxmlformats.org/officeDocument/2006/relationships" xmlns:p="http://schemas.openxmlformats.org/presentationml/2006/main" show="0">
+  <p:cSld>
+    <p:spTree>
+      <p:nvGrpSpPr>
+        <p:cNvPr id="1" name=""/>
+        <p:cNvGrpSpPr/>
+        <p:nvPr/>
+      </p:nvGrpSpPr>
+      <p:grpSpPr>
+        <a:xfrm>
+          <a:off x="0" y="0"/>
+          <a:ext cx="0" cy="0"/>
+          <a:chOff x="0" y="0"/>
+          <a:chExt cx="0" cy="0"/>
+        </a:xfrm>
+      </p:grpSpPr>
+      <p:sp>
+        <p:nvSpPr>
+          <p:cNvPr id="2" name="タイトル 1"/>
+          <p:cNvSpPr>
+            <a:spLocks noGrp="1"/>
+          </p:cNvSpPr>
+          <p:nvPr>
+            <p:ph type="title"/>
+          </p:nvPr>
+        </p:nvSpPr>
+        <p:spPr/>
+        <p:txBody>
+          <a:bodyPr/>
+          <a:lstStyle/>
+          <a:p>
+            <a:r>
+              <a:rPr lang="ja-JP" altLang="en-US" dirty="0"/>
+              <a:t>発表</a:t>
+            </a:r>
+            <a:endParaRPr kumimoji="1" lang="ja-JP" altLang="en-US" dirty="0"/>
+          </a:p>
+        </p:txBody>
+      </p:sp>
+      <p:sp>
+        <p:nvSpPr>
+          <p:cNvPr id="3" name="コンテンツ プレースホルダー 2"/>
+          <p:cNvSpPr>
+            <a:spLocks noGrp="1"/>
+          </p:cNvSpPr>
+          <p:nvPr>
+            <p:ph idx="1"/>
+          </p:nvPr>
+        </p:nvSpPr>
+        <p:spPr/>
+        <p:txBody>
+          <a:bodyPr>
+            <a:normAutofit/>
+          </a:bodyPr>
+          <a:lstStyle/>
+          <a:p>
+            <a:pPr marL="514350" indent="-514350">
+              <a:buFont typeface="+mj-lt"/>
+              <a:buAutoNum type="arabicPeriod"/>
+            </a:pPr>
+            <a:r>
+              <a:rPr lang="ja-JP" altLang="en-US" dirty="0"/>
+              <a:t>どんな案件・テーマ・プロジェクトだったか</a:t>
+            </a:r>
+            <a:endParaRPr lang="en-US" altLang="ja-JP" dirty="0"/>
+          </a:p>
+          <a:p>
+            <a:pPr marL="400050" lvl="1" indent="0">
+              <a:buNone/>
+            </a:pPr>
+            <a:r>
+              <a:rPr lang="ja-JP" altLang="en-US" sz="2000" dirty="0"/>
+              <a:t>全員が「あの話ね」とわかる程度で</a:t>
+            </a:r>
+            <a:endParaRPr lang="en-US" altLang="ja-JP" sz="2000" dirty="0"/>
+          </a:p>
+          <a:p>
+            <a:pPr marL="400050" lvl="1" indent="0">
+              <a:buNone/>
+            </a:pPr>
+            <a:endParaRPr lang="en-US" altLang="ja-JP" sz="2000" dirty="0"/>
+          </a:p>
+          <a:p>
+            <a:pPr marL="457200" indent="-457200">
+              <a:buFont typeface="+mj-lt"/>
+              <a:buAutoNum type="arabicPeriod"/>
+            </a:pPr>
+            <a:r>
+              <a:rPr lang="ja-JP" altLang="en-US" dirty="0"/>
+              <a:t>選んだ３枚を１枚１枚理由をつけて説明する</a:t>
+            </a:r>
+            <a:endParaRPr lang="en-US" altLang="ja-JP" dirty="0"/>
+          </a:p>
+          <a:p>
+            <a:pPr marL="457200" indent="-457200">
+              <a:buFont typeface="+mj-lt"/>
+              <a:buAutoNum type="arabicPeriod"/>
+            </a:pPr>
+            <a:endParaRPr lang="en-US" altLang="ja-JP" sz="2000" dirty="0"/>
+          </a:p>
+          <a:p>
+            <a:pPr marL="457200" indent="-457200">
+              <a:buFont typeface="+mj-lt"/>
+              <a:buAutoNum type="arabicPeriod"/>
+            </a:pPr>
+            <a:r>
+              <a:rPr lang="ja-JP" altLang="en-US" dirty="0">
+                <a:latin typeface="+mn-ea"/>
+              </a:rPr>
+              <a:t>持ち時間</a:t>
+            </a:r>
+            <a:r>
+              <a:rPr lang="en-US" altLang="ja-JP" dirty="0">
+                <a:latin typeface="+mn-ea"/>
+              </a:rPr>
+              <a:t>3</a:t>
+            </a:r>
+            <a:r>
+              <a:rPr lang="ja-JP" altLang="en-US" dirty="0">
+                <a:latin typeface="+mn-ea"/>
+              </a:rPr>
+              <a:t>分</a:t>
+            </a:r>
+            <a:endParaRPr lang="en-US" altLang="ja-JP" dirty="0">
+              <a:latin typeface="+mn-ea"/>
+            </a:endParaRPr>
+          </a:p>
+          <a:p>
+            <a:pPr marL="0" indent="0">
+              <a:buNone/>
+            </a:pPr>
+            <a:endParaRPr lang="en-US" altLang="ja-JP" sz="2400" dirty="0"/>
+          </a:p>
+          <a:p>
+            <a:pPr marL="914400" lvl="1" indent="-514350">
+              <a:buFont typeface="+mj-lt"/>
+              <a:buAutoNum type="arabicPeriod"/>
+            </a:pPr>
+            <a:endParaRPr lang="en-US" altLang="ja-JP" dirty="0"/>
+          </a:p>
+        </p:txBody>
+      </p:sp>
+    </p:spTree>
+  </p:cSld>
+  <p:clrMapOvr>
+    <a:masterClrMapping/>
+  </p:clrMapOvr>
+</p:sld>
+</file>
+
+<file path=ppt/slides/slide14.xml><?xml version="1.0" encoding="utf-8"?>
+<p:sld xmlns:a="http://schemas.openxmlformats.org/drawingml/2006/main" xmlns:r="http://schemas.openxmlformats.org/officeDocument/2006/relationships" xmlns:p="http://schemas.openxmlformats.org/presentationml/2006/main" show="0">
+  <p:cSld>
+    <p:spTree>
+      <p:nvGrpSpPr>
+        <p:cNvPr id="1" name=""/>
+        <p:cNvGrpSpPr/>
+        <p:nvPr/>
+      </p:nvGrpSpPr>
+      <p:grpSpPr>
+        <a:xfrm>
+          <a:off x="0" y="0"/>
+          <a:ext cx="0" cy="0"/>
+          <a:chOff x="0" y="0"/>
+          <a:chExt cx="0" cy="0"/>
+        </a:xfrm>
+      </p:grpSpPr>
+      <p:sp>
+        <p:nvSpPr>
+          <p:cNvPr id="2" name="タイトル 1"/>
+          <p:cNvSpPr>
+            <a:spLocks noGrp="1"/>
+          </p:cNvSpPr>
+          <p:nvPr>
+            <p:ph type="title"/>
+          </p:nvPr>
+        </p:nvSpPr>
+        <p:spPr/>
+        <p:txBody>
+          <a:bodyPr/>
+          <a:lstStyle/>
+          <a:p>
+            <a:r>
+              <a:rPr lang="ja-JP" altLang="en-US" dirty="0"/>
+              <a:t>本日のお題</a:t>
+            </a:r>
+            <a:endParaRPr kumimoji="1" lang="ja-JP" altLang="en-US" dirty="0"/>
+          </a:p>
+        </p:txBody>
+      </p:sp>
+      <p:sp>
+        <p:nvSpPr>
+          <p:cNvPr id="3" name="コンテンツ プレースホルダー 2"/>
+          <p:cNvSpPr>
+            <a:spLocks noGrp="1"/>
+          </p:cNvSpPr>
+          <p:nvPr>
+            <p:ph idx="1"/>
+          </p:nvPr>
+        </p:nvSpPr>
+        <p:spPr/>
+        <p:txBody>
+          <a:bodyPr/>
+          <a:lstStyle/>
+          <a:p>
+            <a:pPr marL="0" indent="0" algn="ctr">
+              <a:buNone/>
+            </a:pPr>
+            <a:r>
+              <a:rPr kumimoji="1" lang="ja-JP" altLang="en-US" dirty="0"/>
+              <a:t>私の仕事に対するモティベーション</a:t>
+            </a:r>
+            <a:endParaRPr kumimoji="1" lang="en-US" altLang="ja-JP" dirty="0"/>
+          </a:p>
+          <a:p>
+            <a:pPr marL="0" indent="0" algn="ctr">
+              <a:buNone/>
+            </a:pPr>
+            <a:endParaRPr lang="en-US" altLang="ja-JP" dirty="0"/>
+          </a:p>
+          <a:p>
+            <a:pPr marL="0" indent="0" algn="ctr">
+              <a:buNone/>
+            </a:pPr>
+            <a:r>
+              <a:rPr lang="ja-JP" altLang="en-US" dirty="0"/>
+              <a:t>○○になっていると、俄然やる気がでる</a:t>
+            </a:r>
+            <a:endParaRPr lang="en-US" altLang="ja-JP" dirty="0"/>
+          </a:p>
+          <a:p>
+            <a:pPr marL="0" indent="0" algn="ctr">
+              <a:buNone/>
+            </a:pPr>
+            <a:r>
+              <a:rPr kumimoji="1" lang="ja-JP" altLang="en-US" dirty="0"/>
+              <a:t>○○な状態になっていたい</a:t>
+            </a:r>
+          </a:p>
+        </p:txBody>
+      </p:sp>
+    </p:spTree>
+  </p:cSld>
+  <p:clrMapOvr>
+    <a:masterClrMapping/>
+  </p:clrMapOvr>
+</p:sld>
+</file>
+
+<file path=ppt/slides/slide15.xml><?xml version="1.0" encoding="utf-8"?>
 <p:sld xmlns:a="http://schemas.openxmlformats.org/drawingml/2006/main" xmlns:r="http://schemas.openxmlformats.org/officeDocument/2006/relationships" xmlns:p="http://schemas.openxmlformats.org/presentationml/2006/main">
   <p:cSld>
     <p:spTree>
@@ -5052,7 +5550,15 @@
           <a:p>
             <a:r>
               <a:rPr lang="ja-JP" altLang="en-US" dirty="0"/>
-              <a:t>で、モティベーションポーカー</a:t>
+              <a:t>で、</a:t>
+            </a:r>
+            <a:r>
+              <a:rPr lang="en-US" altLang="ja-JP" dirty="0" err="1"/>
+              <a:t>ValueCard</a:t>
+            </a:r>
+            <a:r>
+              <a:rPr lang="en-US" altLang="ja-JP" dirty="0"/>
+              <a:t> Poker</a:t>
             </a:r>
             <a:endParaRPr kumimoji="1" lang="ja-JP" altLang="en-US" dirty="0"/>
           </a:p>
@@ -5068,10 +5574,15 @@
             <p:ph idx="1"/>
           </p:nvPr>
         </p:nvSpPr>
-        <p:spPr/>
+        <p:spPr>
+          <a:xfrm>
+            <a:off x="407368" y="1772816"/>
+            <a:ext cx="6192688" cy="4032448"/>
+          </a:xfrm>
+        </p:spPr>
         <p:txBody>
           <a:bodyPr>
-            <a:normAutofit/>
+            <a:normAutofit lnSpcReduction="10000"/>
           </a:bodyPr>
           <a:lstStyle/>
           <a:p>
@@ -5178,6 +5689,36 @@
           </a:p>
         </p:txBody>
       </p:sp>
+      <p:pic>
+        <p:nvPicPr>
+          <p:cNvPr id="5" name="図 4" descr="ダイアグラム&#10;&#10;AI 生成コンテンツは誤りを含む可能性があります。">
+            <a:extLst>
+              <a:ext uri="{FF2B5EF4-FFF2-40B4-BE49-F238E27FC236}">
+                <a16:creationId xmlns:a16="http://schemas.microsoft.com/office/drawing/2014/main" id="{907C00C2-5D60-B4D5-9B7A-25EBCD0052F3}"/>
+              </a:ext>
+            </a:extLst>
+          </p:cNvPr>
+          <p:cNvPicPr>
+            <a:picLocks noChangeAspect="1"/>
+          </p:cNvPicPr>
+          <p:nvPr/>
+        </p:nvPicPr>
+        <p:blipFill>
+          <a:blip r:embed="rId2"/>
+          <a:stretch>
+            <a:fillRect/>
+          </a:stretch>
+        </p:blipFill>
+        <p:spPr>
+          <a:xfrm>
+            <a:off x="6672064" y="1690689"/>
+            <a:ext cx="4987037" cy="3350747"/>
+          </a:xfrm>
+          <a:prstGeom prst="rect">
+            <a:avLst/>
+          </a:prstGeom>
+        </p:spPr>
+      </p:pic>
     </p:spTree>
   </p:cSld>
   <p:clrMapOvr>
@@ -5328,7 +5869,11 @@
               <a:rPr lang="ja-JP" altLang="en-US" dirty="0"/>
               <a:t>やってみよう</a:t>
             </a:r>
-            <a:endParaRPr kumimoji="1" lang="ja-JP" altLang="en-US" dirty="0"/>
+            <a:r>
+              <a:rPr lang="ja-JP" altLang="en-US" sz="2800" dirty="0"/>
+              <a:t>　～一般的な遊び方～</a:t>
+            </a:r>
+            <a:endParaRPr kumimoji="1" lang="ja-JP" altLang="en-US" sz="2800" dirty="0"/>
           </a:p>
         </p:txBody>
       </p:sp>
@@ -5342,7 +5887,12 @@
             <p:ph idx="1"/>
           </p:nvPr>
         </p:nvSpPr>
-        <p:spPr/>
+        <p:spPr>
+          <a:xfrm>
+            <a:off x="838200" y="1825625"/>
+            <a:ext cx="6913984" cy="4351338"/>
+          </a:xfrm>
+        </p:spPr>
         <p:txBody>
           <a:bodyPr>
             <a:normAutofit/>
@@ -5452,6 +6002,53 @@
           </a:p>
         </p:txBody>
       </p:sp>
+      <p:pic>
+        <p:nvPicPr>
+          <p:cNvPr id="1026" name="Picture 2">
+            <a:extLst>
+              <a:ext uri="{FF2B5EF4-FFF2-40B4-BE49-F238E27FC236}">
+                <a16:creationId xmlns:a16="http://schemas.microsoft.com/office/drawing/2014/main" id="{9DA7AAAF-3DAD-8E79-EC02-68CDF40B0F65}"/>
+              </a:ext>
+            </a:extLst>
+          </p:cNvPr>
+          <p:cNvPicPr>
+            <a:picLocks noChangeAspect="1" noChangeArrowheads="1"/>
+          </p:cNvPicPr>
+          <p:nvPr/>
+        </p:nvPicPr>
+        <p:blipFill>
+          <a:blip r:embed="rId2">
+            <a:extLst>
+              <a:ext uri="{28A0092B-C50C-407E-A947-70E740481C1C}">
+                <a14:useLocalDpi xmlns:a14="http://schemas.microsoft.com/office/drawing/2010/main" val="0"/>
+              </a:ext>
+            </a:extLst>
+          </a:blip>
+          <a:srcRect/>
+          <a:stretch>
+            <a:fillRect/>
+          </a:stretch>
+        </p:blipFill>
+        <p:spPr bwMode="auto">
+          <a:xfrm>
+            <a:off x="7728013" y="1711277"/>
+            <a:ext cx="3996852" cy="4077072"/>
+          </a:xfrm>
+          <a:prstGeom prst="rect">
+            <a:avLst/>
+          </a:prstGeom>
+          <a:noFill/>
+          <a:extLst>
+            <a:ext uri="{909E8E84-426E-40DD-AFC4-6F175D3DCCD1}">
+              <a14:hiddenFill xmlns:a14="http://schemas.microsoft.com/office/drawing/2010/main">
+                <a:solidFill>
+                  <a:srgbClr val="FFFFFF"/>
+                </a:solidFill>
+              </a14:hiddenFill>
+            </a:ext>
+          </a:extLst>
+        </p:spPr>
+      </p:pic>
     </p:spTree>
   </p:cSld>
   <p:clrMapOvr>
@@ -5499,16 +6096,25 @@
             <p:ph type="title"/>
           </p:nvPr>
         </p:nvSpPr>
-        <p:spPr/>
+        <p:spPr>
+          <a:xfrm>
+            <a:off x="695400" y="231229"/>
+            <a:ext cx="11353800" cy="1325563"/>
+          </a:xfrm>
+        </p:spPr>
         <p:txBody>
           <a:bodyPr/>
           <a:lstStyle/>
           <a:p>
             <a:r>
               <a:rPr lang="ja-JP" altLang="en-US" dirty="0"/>
-              <a:t>本日のお題</a:t>
-            </a:r>
-            <a:endParaRPr kumimoji="1" lang="ja-JP" altLang="en-US" dirty="0"/>
+              <a:t>やってみよう　</a:t>
+            </a:r>
+            <a:r>
+              <a:rPr lang="ja-JP" altLang="en-US" sz="2800" dirty="0"/>
+              <a:t>～本日はユドナリウムを使ってデモします～</a:t>
+            </a:r>
+            <a:endParaRPr kumimoji="1" lang="ja-JP" altLang="en-US" sz="2800" dirty="0"/>
           </a:p>
         </p:txBody>
       </p:sp>
@@ -5528,88 +6134,208 @@
             <p:ph idx="1"/>
           </p:nvPr>
         </p:nvSpPr>
-        <p:spPr/>
-        <p:txBody>
-          <a:bodyPr/>
+        <p:spPr>
+          <a:xfrm>
+            <a:off x="407368" y="1556792"/>
+            <a:ext cx="5976664" cy="4680520"/>
+          </a:xfrm>
+        </p:spPr>
+        <p:txBody>
+          <a:bodyPr>
+            <a:normAutofit fontScale="92500" lnSpcReduction="10000"/>
+          </a:bodyPr>
           <a:lstStyle/>
           <a:p>
-            <a:pPr marL="0" indent="0" algn="ctr">
+            <a:pPr marL="0" indent="0">
               <a:buNone/>
             </a:pPr>
             <a:r>
               <a:rPr kumimoji="1" lang="ja-JP" altLang="en-US" dirty="0"/>
+              <a:t>１．本日のお題</a:t>
+            </a:r>
+            <a:br>
+              <a:rPr kumimoji="1" lang="en-US" altLang="ja-JP" dirty="0"/>
+            </a:br>
+            <a:r>
+              <a:rPr kumimoji="1" lang="ja-JP" altLang="en-US" sz="2400" dirty="0"/>
               <a:t>カードに記載してある単語に「ピン！」ときた</a:t>
             </a:r>
             <a:r>
-              <a:rPr kumimoji="1" lang="en-US" altLang="ja-JP" dirty="0"/>
+              <a:rPr kumimoji="1" lang="en-US" altLang="ja-JP" sz="2400" dirty="0"/>
               <a:t>3</a:t>
             </a:r>
             <a:r>
-              <a:rPr kumimoji="1" lang="ja-JP" altLang="en-US" dirty="0"/>
+              <a:rPr kumimoji="1" lang="ja-JP" altLang="en-US" sz="2400" dirty="0"/>
               <a:t>枚を選ぶ</a:t>
             </a:r>
-            <a:endParaRPr kumimoji="1" lang="en-US" altLang="ja-JP" dirty="0"/>
-          </a:p>
-          <a:p>
-            <a:pPr marL="0" indent="0" algn="ctr">
+            <a:endParaRPr kumimoji="1" lang="en-US" altLang="ja-JP" sz="2400" dirty="0"/>
+          </a:p>
+          <a:p>
+            <a:pPr marL="0" indent="0">
               <a:buNone/>
             </a:pPr>
             <a:endParaRPr lang="en-US" altLang="ja-JP" dirty="0"/>
           </a:p>
           <a:p>
-            <a:pPr marL="0" indent="0" algn="ctr">
+            <a:pPr marL="0" indent="0">
               <a:buNone/>
             </a:pPr>
             <a:r>
               <a:rPr lang="ja-JP" altLang="en-US" dirty="0"/>
-              <a:t>まずは５枚選ぶ</a:t>
+              <a:t>２．まずは５枚選ぶ</a:t>
             </a:r>
             <a:endParaRPr lang="en-US" altLang="ja-JP" dirty="0"/>
           </a:p>
           <a:p>
-            <a:pPr marL="0" indent="0" algn="ctr">
+            <a:pPr marL="0" indent="0">
               <a:buNone/>
             </a:pPr>
             <a:r>
-              <a:rPr lang="ja-JP" altLang="en-US" dirty="0"/>
+              <a:rPr lang="ja-JP" altLang="en-US" sz="2400" dirty="0"/>
               <a:t>逆に「これはない」というカードを除外していってもよい</a:t>
             </a:r>
-            <a:endParaRPr lang="en-US" altLang="ja-JP" dirty="0"/>
-          </a:p>
-          <a:p>
-            <a:pPr marL="0" indent="0" algn="ctr">
+            <a:endParaRPr lang="en-US" altLang="ja-JP" sz="2400" dirty="0"/>
+          </a:p>
+          <a:p>
+            <a:pPr marL="0" indent="0">
               <a:buNone/>
             </a:pPr>
             <a:endParaRPr lang="en-US" altLang="ja-JP" dirty="0"/>
           </a:p>
           <a:p>
-            <a:pPr marL="0" indent="0" algn="ctr">
+            <a:pPr marL="0" indent="0">
               <a:buNone/>
             </a:pPr>
             <a:r>
               <a:rPr kumimoji="1" lang="ja-JP" altLang="en-US" dirty="0"/>
-              <a:t>さらに３枚選ぶ</a:t>
+              <a:t>３．さらに３枚選ぶ</a:t>
             </a:r>
             <a:endParaRPr kumimoji="1" lang="en-US" altLang="ja-JP" dirty="0"/>
           </a:p>
           <a:p>
-            <a:pPr marL="0" indent="0" algn="ctr">
+            <a:pPr marL="0" indent="0">
               <a:buNone/>
             </a:pPr>
             <a:endParaRPr lang="en-US" altLang="ja-JP" dirty="0"/>
           </a:p>
           <a:p>
-            <a:pPr marL="0" indent="0" algn="ctr">
+            <a:pPr marL="0" indent="0">
               <a:buNone/>
             </a:pPr>
             <a:r>
-              <a:rPr kumimoji="1" lang="ja-JP" altLang="en-US"/>
-              <a:t>最後に、選んだ３枚から順番をつける</a:t>
-            </a:r>
-            <a:endParaRPr kumimoji="1" lang="ja-JP" altLang="en-US" dirty="0"/>
-          </a:p>
-        </p:txBody>
-      </p:sp>
+              <a:rPr kumimoji="1" lang="ja-JP" altLang="en-US" dirty="0"/>
+              <a:t>４．最後に、選んだ３枚から順番をつける</a:t>
+            </a:r>
+          </a:p>
+        </p:txBody>
+      </p:sp>
+      <p:graphicFrame>
+        <p:nvGraphicFramePr>
+          <p:cNvPr id="4" name="表 3">
+            <a:extLst>
+              <a:ext uri="{FF2B5EF4-FFF2-40B4-BE49-F238E27FC236}">
+                <a16:creationId xmlns:a16="http://schemas.microsoft.com/office/drawing/2014/main" id="{9112970F-3D1D-8ACD-FFF3-CB2CF4468EA1}"/>
+              </a:ext>
+            </a:extLst>
+          </p:cNvPr>
+          <p:cNvGraphicFramePr>
+            <a:graphicFrameLocks noGrp="1"/>
+          </p:cNvGraphicFramePr>
+          <p:nvPr>
+            <p:extLst>
+              <p:ext uri="{D42A27DB-BD31-4B8C-83A1-F6EECF244321}">
+                <p14:modId xmlns:p14="http://schemas.microsoft.com/office/powerpoint/2010/main" val="1670684365"/>
+              </p:ext>
+            </p:extLst>
+          </p:nvPr>
+        </p:nvGraphicFramePr>
+        <p:xfrm>
+          <a:off x="7573380" y="5560719"/>
+          <a:ext cx="3456384" cy="373380"/>
+        </p:xfrm>
+        <a:graphic>
+          <a:graphicData uri="http://schemas.openxmlformats.org/drawingml/2006/table">
+            <a:tbl>
+              <a:tblPr>
+                <a:tableStyleId>{5C22544A-7EE6-4342-B048-85BDC9FD1C3A}</a:tableStyleId>
+              </a:tblPr>
+              <a:tblGrid>
+                <a:gridCol w="3456384">
+                  <a:extLst>
+                    <a:ext uri="{9D8B030D-6E8A-4147-A177-3AD203B41FA5}">
+                      <a16:colId xmlns:a16="http://schemas.microsoft.com/office/drawing/2014/main" val="6146871"/>
+                    </a:ext>
+                  </a:extLst>
+                </a:gridCol>
+              </a:tblGrid>
+              <a:tr h="228600">
+                <a:tc>
+                  <a:txBody>
+                    <a:bodyPr/>
+                    <a:lstStyle/>
+                    <a:p>
+                      <a:pPr algn="ctr" fontAlgn="ctr">
+                        <a:buNone/>
+                      </a:pPr>
+                      <a:r>
+                        <a:rPr lang="fr-FR" sz="2400" u="sng" strike="noStrike" dirty="0">
+                          <a:effectLst/>
+                          <a:hlinkClick r:id="rId2"/>
+                        </a:rPr>
+                        <a:t>https://udonarium.app/</a:t>
+                      </a:r>
+                      <a:endParaRPr lang="fr-FR" sz="2400" b="0" i="0" u="sng" strike="noStrike" dirty="0">
+                        <a:solidFill>
+                          <a:srgbClr val="467886"/>
+                        </a:solidFill>
+                        <a:effectLst/>
+                        <a:latin typeface="游ゴシック" panose="020B0400000000000000" pitchFamily="50" charset="-128"/>
+                        <a:ea typeface="游ゴシック" panose="020B0400000000000000" pitchFamily="50" charset="-128"/>
+                      </a:endParaRPr>
+                    </a:p>
+                  </a:txBody>
+                  <a:tcPr marL="7620" marR="7620" marT="7620" marB="0" anchor="ctr"/>
+                </a:tc>
+                <a:extLst>
+                  <a:ext uri="{0D108BD9-81ED-4DB2-BD59-A6C34878D82A}">
+                    <a16:rowId xmlns:a16="http://schemas.microsoft.com/office/drawing/2014/main" val="2016080453"/>
+                  </a:ext>
+                </a:extLst>
+              </a:tr>
+            </a:tbl>
+          </a:graphicData>
+        </a:graphic>
+      </p:graphicFrame>
+      <p:pic>
+        <p:nvPicPr>
+          <p:cNvPr id="5" name="図 4">
+            <a:extLst>
+              <a:ext uri="{FF2B5EF4-FFF2-40B4-BE49-F238E27FC236}">
+                <a16:creationId xmlns:a16="http://schemas.microsoft.com/office/drawing/2014/main" id="{A1296BF9-CBD5-499E-9353-76958E9EF54D}"/>
+              </a:ext>
+            </a:extLst>
+          </p:cNvPr>
+          <p:cNvPicPr>
+            <a:picLocks noChangeAspect="1"/>
+          </p:cNvPicPr>
+          <p:nvPr/>
+        </p:nvPicPr>
+        <p:blipFill>
+          <a:blip r:embed="rId3"/>
+          <a:stretch>
+            <a:fillRect/>
+          </a:stretch>
+        </p:blipFill>
+        <p:spPr>
+          <a:xfrm>
+            <a:off x="6594247" y="1916832"/>
+            <a:ext cx="5244737" cy="3384376"/>
+          </a:xfrm>
+          <a:prstGeom prst="rect">
+            <a:avLst/>
+          </a:prstGeom>
+        </p:spPr>
+      </p:pic>
     </p:spTree>
     <p:extLst>
       <p:ext uri="{BB962C8B-B14F-4D97-AF65-F5344CB8AC3E}">
@@ -5624,7 +6350,7 @@
 </file>
 
 <file path=ppt/slides/slide8.xml><?xml version="1.0" encoding="utf-8"?>
-<p:sld xmlns:a="http://schemas.openxmlformats.org/drawingml/2006/main" xmlns:r="http://schemas.openxmlformats.org/officeDocument/2006/relationships" xmlns:p="http://schemas.openxmlformats.org/presentationml/2006/main" show="0">
+<p:sld xmlns:a="http://schemas.openxmlformats.org/drawingml/2006/main" xmlns:r="http://schemas.openxmlformats.org/officeDocument/2006/relationships" xmlns:p="http://schemas.openxmlformats.org/presentationml/2006/main">
   <p:cSld>
     <p:spTree>
       <p:nvGrpSpPr>
@@ -5642,7 +6368,13 @@
       </p:grpSpPr>
       <p:sp>
         <p:nvSpPr>
-          <p:cNvPr id="2" name="タイトル 1"/>
+          <p:cNvPr id="2" name="タイトル 1">
+            <a:extLst>
+              <a:ext uri="{FF2B5EF4-FFF2-40B4-BE49-F238E27FC236}">
+                <a16:creationId xmlns:a16="http://schemas.microsoft.com/office/drawing/2014/main" id="{936D94B8-DB3F-8683-6490-9CE16AC44817}"/>
+              </a:ext>
+            </a:extLst>
+          </p:cNvPr>
           <p:cNvSpPr>
             <a:spLocks noGrp="1"/>
           </p:cNvSpPr>
@@ -5650,22 +6382,32 @@
             <p:ph type="title"/>
           </p:nvPr>
         </p:nvSpPr>
-        <p:spPr/>
+        <p:spPr>
+          <a:xfrm>
+            <a:off x="838200" y="365127"/>
+            <a:ext cx="6193904" cy="759618"/>
+          </a:xfrm>
+        </p:spPr>
         <p:txBody>
           <a:bodyPr/>
           <a:lstStyle/>
           <a:p>
             <a:r>
-              <a:rPr lang="ja-JP" altLang="en-US" dirty="0"/>
-              <a:t>本日のお題</a:t>
-            </a:r>
-            <a:endParaRPr kumimoji="1" lang="ja-JP" altLang="en-US" dirty="0"/>
-          </a:p>
-        </p:txBody>
-      </p:sp>
-      <p:sp>
-        <p:nvSpPr>
-          <p:cNvPr id="3" name="コンテンツ プレースホルダー 2"/>
+              <a:rPr kumimoji="1" lang="ja-JP" altLang="en-US" dirty="0"/>
+              <a:t>シュワルツの価値理論</a:t>
+            </a:r>
+          </a:p>
+        </p:txBody>
+      </p:sp>
+      <p:sp>
+        <p:nvSpPr>
+          <p:cNvPr id="3" name="コンテンツ プレースホルダー 2">
+            <a:extLst>
+              <a:ext uri="{FF2B5EF4-FFF2-40B4-BE49-F238E27FC236}">
+                <a16:creationId xmlns:a16="http://schemas.microsoft.com/office/drawing/2014/main" id="{D0A4FBBD-C95F-F269-724B-DE7F247CA233}"/>
+              </a:ext>
+            </a:extLst>
+          </p:cNvPr>
           <p:cNvSpPr>
             <a:spLocks noGrp="1"/>
           </p:cNvSpPr>
@@ -5673,48 +6415,259 @@
             <p:ph idx="1"/>
           </p:nvPr>
         </p:nvSpPr>
-        <p:spPr/>
-        <p:txBody>
-          <a:bodyPr/>
+        <p:spPr>
+          <a:xfrm>
+            <a:off x="911424" y="4763522"/>
+            <a:ext cx="10369152" cy="1729351"/>
+          </a:xfrm>
+        </p:spPr>
+        <p:txBody>
+          <a:bodyPr>
+            <a:normAutofit fontScale="70000" lnSpcReduction="20000"/>
+          </a:bodyPr>
           <a:lstStyle/>
           <a:p>
-            <a:pPr marL="0" indent="0" algn="ctr">
-              <a:buNone/>
-            </a:pPr>
-            <a:r>
-              <a:rPr lang="ja-JP" altLang="en-US" dirty="0"/>
-              <a:t>まず、今までで一番テンションあがった案件・テーマ・プロジェクトを思い起こしてみましょう。</a:t>
-            </a:r>
-            <a:endParaRPr lang="en-US" altLang="ja-JP" dirty="0"/>
-          </a:p>
-          <a:p>
-            <a:pPr marL="0" indent="0" algn="ctr">
-              <a:buNone/>
-            </a:pPr>
-            <a:endParaRPr lang="en-US" altLang="ja-JP" dirty="0"/>
-          </a:p>
-          <a:p>
-            <a:pPr marL="0" indent="0" algn="ctr">
-              <a:buNone/>
-            </a:pPr>
-            <a:r>
-              <a:rPr lang="ja-JP" altLang="en-US" dirty="0"/>
-              <a:t>○○になっていると、俄然やる気がでる</a:t>
-            </a:r>
-            <a:endParaRPr lang="en-US" altLang="ja-JP" dirty="0"/>
-          </a:p>
-          <a:p>
-            <a:pPr marL="0" indent="0" algn="ctr">
-              <a:buNone/>
-            </a:pPr>
             <a:r>
               <a:rPr kumimoji="1" lang="ja-JP" altLang="en-US" dirty="0"/>
-              <a:t>○○な状態になっていたい</a:t>
-            </a:r>
-          </a:p>
-        </p:txBody>
-      </p:sp>
+              <a:t>シュワルツの価値理論では、</a:t>
+            </a:r>
+            <a:r>
+              <a:rPr kumimoji="1" lang="en-US" altLang="ja-JP" dirty="0"/>
+              <a:t>10</a:t>
+            </a:r>
+            <a:r>
+              <a:rPr kumimoji="1" lang="ja-JP" altLang="en-US" dirty="0"/>
+              <a:t>個の価値が円環状に整理されている（</a:t>
+            </a:r>
+            <a:r>
+              <a:rPr kumimoji="1" lang="en-US" altLang="ja-JP" dirty="0"/>
+              <a:t>SVS; Schwartz Value Survey)		</a:t>
+            </a:r>
+          </a:p>
+          <a:p>
+            <a:r>
+              <a:rPr kumimoji="1" lang="ja-JP" altLang="en-US" dirty="0"/>
+              <a:t>強い相関がある価値同士を近距離に、弱い相関がある価値同士は遠距離にある関係	</a:t>
+            </a:r>
+          </a:p>
+          <a:p>
+            <a:r>
+              <a:rPr kumimoji="1" lang="ja-JP" altLang="en-US" dirty="0"/>
+              <a:t>上位価値として以下の４つの価値が対極的に位置づけられている	</a:t>
+            </a:r>
+            <a:endParaRPr kumimoji="1" lang="en-US" altLang="ja-JP" dirty="0"/>
+          </a:p>
+          <a:p>
+            <a:pPr lvl="1"/>
+            <a:r>
+              <a:rPr kumimoji="1" lang="ja-JP" altLang="en-US" dirty="0"/>
+              <a:t>変化への開放性（</a:t>
+            </a:r>
+            <a:r>
+              <a:rPr kumimoji="1" lang="en-US" altLang="ja-JP" dirty="0"/>
+              <a:t>Openness to change) </a:t>
+            </a:r>
+            <a:r>
+              <a:rPr kumimoji="1" lang="ja-JP" altLang="en-US" dirty="0"/>
+              <a:t>ー 保存（保守） </a:t>
+            </a:r>
+            <a:r>
+              <a:rPr kumimoji="1" lang="en-US" altLang="ja-JP" dirty="0"/>
+              <a:t>Conservation</a:t>
+            </a:r>
+          </a:p>
+          <a:p>
+            <a:pPr lvl="1"/>
+            <a:r>
+              <a:rPr kumimoji="1" lang="ja-JP" altLang="en-US" dirty="0"/>
+              <a:t>自己超越（</a:t>
+            </a:r>
+            <a:r>
+              <a:rPr kumimoji="1" lang="en-US" altLang="ja-JP" dirty="0"/>
+              <a:t>Self-transcendence) - </a:t>
+            </a:r>
+            <a:r>
+              <a:rPr kumimoji="1" lang="ja-JP" altLang="en-US" dirty="0"/>
+              <a:t>自己増進（</a:t>
+            </a:r>
+            <a:r>
+              <a:rPr kumimoji="1" lang="en-US" altLang="ja-JP" dirty="0"/>
+              <a:t>Self-enhancement )</a:t>
+            </a:r>
+          </a:p>
+        </p:txBody>
+      </p:sp>
+      <p:pic>
+        <p:nvPicPr>
+          <p:cNvPr id="4" name="図 3" descr="ダイアグラム&#10;&#10;AI 生成コンテンツは誤りを含む可能性があります。">
+            <a:extLst>
+              <a:ext uri="{FF2B5EF4-FFF2-40B4-BE49-F238E27FC236}">
+                <a16:creationId xmlns:a16="http://schemas.microsoft.com/office/drawing/2014/main" id="{59CBA02D-AE9E-29A0-65B7-FAFCC25C16CC}"/>
+              </a:ext>
+            </a:extLst>
+          </p:cNvPr>
+          <p:cNvPicPr>
+            <a:picLocks noChangeAspect="1"/>
+          </p:cNvPicPr>
+          <p:nvPr/>
+        </p:nvPicPr>
+        <p:blipFill>
+          <a:blip r:embed="rId2"/>
+          <a:stretch>
+            <a:fillRect/>
+          </a:stretch>
+        </p:blipFill>
+        <p:spPr>
+          <a:xfrm>
+            <a:off x="928352" y="1268761"/>
+            <a:ext cx="3429507" cy="2304256"/>
+          </a:xfrm>
+          <a:prstGeom prst="rect">
+            <a:avLst/>
+          </a:prstGeom>
+        </p:spPr>
+      </p:pic>
+      <p:graphicFrame>
+        <p:nvGraphicFramePr>
+          <p:cNvPr id="5" name="表 4">
+            <a:extLst>
+              <a:ext uri="{FF2B5EF4-FFF2-40B4-BE49-F238E27FC236}">
+                <a16:creationId xmlns:a16="http://schemas.microsoft.com/office/drawing/2014/main" id="{C6389EC8-D63A-47AD-0284-2738B67911CC}"/>
+              </a:ext>
+            </a:extLst>
+          </p:cNvPr>
+          <p:cNvGraphicFramePr>
+            <a:graphicFrameLocks noGrp="1"/>
+          </p:cNvGraphicFramePr>
+          <p:nvPr>
+            <p:extLst>
+              <p:ext uri="{D42A27DB-BD31-4B8C-83A1-F6EECF244321}">
+                <p14:modId xmlns:p14="http://schemas.microsoft.com/office/powerpoint/2010/main" val="3170840055"/>
+              </p:ext>
+            </p:extLst>
+          </p:nvPr>
+        </p:nvGraphicFramePr>
+        <p:xfrm>
+          <a:off x="7464152" y="6474702"/>
+          <a:ext cx="4320480" cy="324371"/>
+        </p:xfrm>
+        <a:graphic>
+          <a:graphicData uri="http://schemas.openxmlformats.org/drawingml/2006/table">
+            <a:tbl>
+              <a:tblPr>
+                <a:tableStyleId>{5C22544A-7EE6-4342-B048-85BDC9FD1C3A}</a:tableStyleId>
+              </a:tblPr>
+              <a:tblGrid>
+                <a:gridCol w="4320480">
+                  <a:extLst>
+                    <a:ext uri="{9D8B030D-6E8A-4147-A177-3AD203B41FA5}">
+                      <a16:colId xmlns:a16="http://schemas.microsoft.com/office/drawing/2014/main" val="2012913033"/>
+                    </a:ext>
+                  </a:extLst>
+                </a:gridCol>
+              </a:tblGrid>
+              <a:tr h="324371">
+                <a:tc>
+                  <a:txBody>
+                    <a:bodyPr/>
+                    <a:lstStyle/>
+                    <a:p>
+                      <a:pPr algn="r" fontAlgn="ctr">
+                        <a:buNone/>
+                      </a:pPr>
+                      <a:r>
+                        <a:rPr lang="ja-JP" altLang="en-US" sz="800" u="none" strike="noStrike" dirty="0">
+                          <a:effectLst/>
+                        </a:rPr>
+                        <a:t>坂野、武藤 「「価値」の機能とは何か：</a:t>
+                      </a:r>
+                      <a:br>
+                        <a:rPr lang="ja-JP" altLang="en-US" sz="800" u="none" strike="noStrike" dirty="0">
+                          <a:effectLst/>
+                        </a:rPr>
+                      </a:br>
+                      <a:r>
+                        <a:rPr lang="ja-JP" altLang="en-US" sz="800" u="none" strike="noStrike" dirty="0">
+                          <a:effectLst/>
+                        </a:rPr>
+                        <a:t>実証に基づく価値研究についての展望」 心理臨床科学，第２巻，第１号，</a:t>
+                      </a:r>
+                      <a:r>
+                        <a:rPr lang="en-US" altLang="ja-JP" sz="800" u="none" strike="noStrike" dirty="0">
+                          <a:effectLst/>
+                        </a:rPr>
+                        <a:t>69-80</a:t>
+                      </a:r>
+                      <a:r>
+                        <a:rPr lang="ja-JP" altLang="en-US" sz="800" u="none" strike="noStrike" dirty="0">
+                          <a:effectLst/>
+                        </a:rPr>
+                        <a:t>，</a:t>
+                      </a:r>
+                      <a:r>
+                        <a:rPr lang="en-US" altLang="ja-JP" sz="800" u="none" strike="noStrike" dirty="0">
+                          <a:effectLst/>
+                        </a:rPr>
+                        <a:t>2012</a:t>
+                      </a:r>
+                      <a:endParaRPr lang="en-US" altLang="ja-JP" sz="800" b="0" i="0" u="none" strike="noStrike" dirty="0">
+                        <a:solidFill>
+                          <a:srgbClr val="000000"/>
+                        </a:solidFill>
+                        <a:effectLst/>
+                        <a:latin typeface="游ゴシック" panose="020B0400000000000000" pitchFamily="50" charset="-128"/>
+                        <a:ea typeface="游ゴシック" panose="020B0400000000000000" pitchFamily="50" charset="-128"/>
+                      </a:endParaRPr>
+                    </a:p>
+                  </a:txBody>
+                  <a:tcPr marL="7620" marR="7620" marT="7620" marB="0" anchor="ctr"/>
+                </a:tc>
+                <a:extLst>
+                  <a:ext uri="{0D108BD9-81ED-4DB2-BD59-A6C34878D82A}">
+                    <a16:rowId xmlns:a16="http://schemas.microsoft.com/office/drawing/2014/main" val="2461648923"/>
+                  </a:ext>
+                </a:extLst>
+              </a:tr>
+            </a:tbl>
+          </a:graphicData>
+        </a:graphic>
+      </p:graphicFrame>
+      <p:pic>
+        <p:nvPicPr>
+          <p:cNvPr id="6" name="図 5">
+            <a:extLst>
+              <a:ext uri="{FF2B5EF4-FFF2-40B4-BE49-F238E27FC236}">
+                <a16:creationId xmlns:a16="http://schemas.microsoft.com/office/drawing/2014/main" id="{190A4A81-BD0E-2548-9A1C-8C51DD334B86}"/>
+              </a:ext>
+            </a:extLst>
+          </p:cNvPr>
+          <p:cNvPicPr>
+            <a:picLocks noChangeAspect="1"/>
+          </p:cNvPicPr>
+          <p:nvPr/>
+        </p:nvPicPr>
+        <p:blipFill>
+          <a:blip r:embed="rId3"/>
+          <a:stretch>
+            <a:fillRect/>
+          </a:stretch>
+        </p:blipFill>
+        <p:spPr>
+          <a:xfrm>
+            <a:off x="4727848" y="1335278"/>
+            <a:ext cx="5904656" cy="3270725"/>
+          </a:xfrm>
+          <a:prstGeom prst="rect">
+            <a:avLst/>
+          </a:prstGeom>
+        </p:spPr>
+      </p:pic>
     </p:spTree>
+    <p:extLst>
+      <p:ext uri="{BB962C8B-B14F-4D97-AF65-F5344CB8AC3E}">
+        <p14:creationId xmlns:p14="http://schemas.microsoft.com/office/powerpoint/2010/main" val="3100712712"/>
+      </p:ext>
+    </p:extLst>
   </p:cSld>
   <p:clrMapOvr>
     <a:masterClrMapping/>
@@ -5723,11 +6676,17 @@
 </file>
 
 <file path=ppt/slides/slide9.xml><?xml version="1.0" encoding="utf-8"?>
-<p:sld xmlns:a="http://schemas.openxmlformats.org/drawingml/2006/main" xmlns:r="http://schemas.openxmlformats.org/officeDocument/2006/relationships" xmlns:p="http://schemas.openxmlformats.org/presentationml/2006/main" show="0">
+<p:sld xmlns:a="http://schemas.openxmlformats.org/drawingml/2006/main" xmlns:r="http://schemas.openxmlformats.org/officeDocument/2006/relationships" xmlns:p="http://schemas.openxmlformats.org/presentationml/2006/main">
   <p:cSld>
     <p:spTree>
       <p:nvGrpSpPr>
-        <p:cNvPr id="1" name=""/>
+        <p:cNvPr id="1" name="">
+          <a:extLst>
+            <a:ext uri="{FF2B5EF4-FFF2-40B4-BE49-F238E27FC236}">
+              <a16:creationId xmlns:a16="http://schemas.microsoft.com/office/drawing/2014/main" id="{65795921-816E-1AE2-936D-79C50BB42023}"/>
+            </a:ext>
+          </a:extLst>
+        </p:cNvPr>
         <p:cNvGrpSpPr/>
         <p:nvPr/>
       </p:nvGrpSpPr>
@@ -5741,7 +6700,13 @@
       </p:grpSpPr>
       <p:sp>
         <p:nvSpPr>
-          <p:cNvPr id="2" name="タイトル 1"/>
+          <p:cNvPr id="2" name="タイトル 1">
+            <a:extLst>
+              <a:ext uri="{FF2B5EF4-FFF2-40B4-BE49-F238E27FC236}">
+                <a16:creationId xmlns:a16="http://schemas.microsoft.com/office/drawing/2014/main" id="{AAA6B1C4-A385-95F4-95D8-619E04DA1EF3}"/>
+              </a:ext>
+            </a:extLst>
+          </p:cNvPr>
           <p:cNvSpPr>
             <a:spLocks noGrp="1"/>
           </p:cNvSpPr>
@@ -5749,22 +6714,32 @@
             <p:ph type="title"/>
           </p:nvPr>
         </p:nvSpPr>
-        <p:spPr/>
+        <p:spPr>
+          <a:xfrm>
+            <a:off x="838200" y="365127"/>
+            <a:ext cx="6193904" cy="759618"/>
+          </a:xfrm>
+        </p:spPr>
         <p:txBody>
           <a:bodyPr/>
           <a:lstStyle/>
           <a:p>
             <a:r>
-              <a:rPr lang="ja-JP" altLang="en-US" dirty="0"/>
-              <a:t>発表</a:t>
-            </a:r>
-            <a:endParaRPr kumimoji="1" lang="ja-JP" altLang="en-US" dirty="0"/>
-          </a:p>
-        </p:txBody>
-      </p:sp>
-      <p:sp>
-        <p:nvSpPr>
-          <p:cNvPr id="3" name="コンテンツ プレースホルダー 2"/>
+              <a:rPr kumimoji="1" lang="ja-JP" altLang="en-US" dirty="0"/>
+              <a:t>シュワルツの価値理論</a:t>
+            </a:r>
+          </a:p>
+        </p:txBody>
+      </p:sp>
+      <p:sp>
+        <p:nvSpPr>
+          <p:cNvPr id="3" name="コンテンツ プレースホルダー 2">
+            <a:extLst>
+              <a:ext uri="{FF2B5EF4-FFF2-40B4-BE49-F238E27FC236}">
+                <a16:creationId xmlns:a16="http://schemas.microsoft.com/office/drawing/2014/main" id="{1768E862-E7C1-CA3B-F005-0B555134C790}"/>
+              </a:ext>
+            </a:extLst>
+          </p:cNvPr>
           <p:cNvSpPr>
             <a:spLocks noGrp="1"/>
           </p:cNvSpPr>
@@ -5772,100 +6747,730 @@
             <p:ph idx="1"/>
           </p:nvPr>
         </p:nvSpPr>
-        <p:spPr/>
+        <p:spPr>
+          <a:xfrm>
+            <a:off x="479376" y="1528283"/>
+            <a:ext cx="5040560" cy="1185758"/>
+          </a:xfrm>
+        </p:spPr>
         <p:txBody>
           <a:bodyPr>
-            <a:normAutofit/>
+            <a:normAutofit fontScale="92500" lnSpcReduction="10000"/>
           </a:bodyPr>
           <a:lstStyle/>
           <a:p>
-            <a:pPr marL="514350" indent="-514350">
-              <a:buFont typeface="+mj-lt"/>
-              <a:buAutoNum type="arabicPeriod"/>
+            <a:pPr marL="0" indent="0">
+              <a:buNone/>
             </a:pPr>
             <a:r>
+              <a:rPr kumimoji="1" lang="ja-JP" altLang="en-US" dirty="0"/>
+              <a:t>たとえば、</a:t>
+            </a:r>
+            <a:endParaRPr kumimoji="1" lang="en-US" altLang="ja-JP" dirty="0"/>
+          </a:p>
+          <a:p>
+            <a:pPr marL="0" indent="0">
+              <a:buNone/>
+            </a:pPr>
+            <a:r>
+              <a:rPr kumimoji="1" lang="ja-JP" altLang="en-US" dirty="0"/>
+              <a:t>「達成」「自己決定」「刺激」に価値があるとした場合</a:t>
+            </a:r>
+            <a:endParaRPr kumimoji="1" lang="en-US" altLang="ja-JP" dirty="0"/>
+          </a:p>
+        </p:txBody>
+      </p:sp>
+      <p:grpSp>
+        <p:nvGrpSpPr>
+          <p:cNvPr id="12" name="グループ化 11">
+            <a:extLst>
+              <a:ext uri="{FF2B5EF4-FFF2-40B4-BE49-F238E27FC236}">
+                <a16:creationId xmlns:a16="http://schemas.microsoft.com/office/drawing/2014/main" id="{A52DF13B-6354-69CE-8A5A-F30B92695286}"/>
+              </a:ext>
+            </a:extLst>
+          </p:cNvPr>
+          <p:cNvGrpSpPr/>
+          <p:nvPr/>
+        </p:nvGrpSpPr>
+        <p:grpSpPr>
+          <a:xfrm>
+            <a:off x="5663952" y="1412776"/>
+            <a:ext cx="5400600" cy="3211242"/>
+            <a:chOff x="4232531" y="2323011"/>
+            <a:chExt cx="3726937" cy="2211977"/>
+          </a:xfrm>
+        </p:grpSpPr>
+        <p:pic>
+          <p:nvPicPr>
+            <p:cNvPr id="8" name="図 7">
+              <a:extLst>
+                <a:ext uri="{FF2B5EF4-FFF2-40B4-BE49-F238E27FC236}">
+                  <a16:creationId xmlns:a16="http://schemas.microsoft.com/office/drawing/2014/main" id="{81C03995-3A0F-4284-DF9D-DCE5927205C6}"/>
+                </a:ext>
+              </a:extLst>
+            </p:cNvPr>
+            <p:cNvPicPr>
+              <a:picLocks noChangeAspect="1"/>
+            </p:cNvPicPr>
+            <p:nvPr/>
+          </p:nvPicPr>
+          <p:blipFill>
+            <a:blip r:embed="rId2"/>
+            <a:stretch>
+              <a:fillRect/>
+            </a:stretch>
+          </p:blipFill>
+          <p:spPr>
+            <a:xfrm>
+              <a:off x="4232531" y="2323011"/>
+              <a:ext cx="3726937" cy="2211977"/>
+            </a:xfrm>
+            <a:prstGeom prst="rect">
+              <a:avLst/>
+            </a:prstGeom>
+          </p:spPr>
+        </p:pic>
+        <p:sp>
+          <p:nvSpPr>
+            <p:cNvPr id="9" name="楕円 8">
+              <a:extLst>
+                <a:ext uri="{FF2B5EF4-FFF2-40B4-BE49-F238E27FC236}">
+                  <a16:creationId xmlns:a16="http://schemas.microsoft.com/office/drawing/2014/main" id="{288C935A-2641-47E6-B5F6-945C390A028A}"/>
+                </a:ext>
+              </a:extLst>
+            </p:cNvPr>
+            <p:cNvSpPr/>
+            <p:nvPr/>
+          </p:nvSpPr>
+          <p:spPr>
+            <a:xfrm>
+              <a:off x="5369272" y="3576774"/>
+              <a:ext cx="342900" cy="303712"/>
+            </a:xfrm>
+            <a:prstGeom prst="ellipse">
+              <a:avLst/>
+            </a:prstGeom>
+            <a:noFill/>
+            <a:ln>
+              <a:solidFill>
+                <a:srgbClr val="FF0000"/>
+              </a:solidFill>
+            </a:ln>
+          </p:spPr>
+          <p:style>
+            <a:lnRef idx="2">
+              <a:schemeClr val="accent1">
+                <a:shade val="15000"/>
+              </a:schemeClr>
+            </a:lnRef>
+            <a:fillRef idx="1">
+              <a:schemeClr val="accent1"/>
+            </a:fillRef>
+            <a:effectRef idx="0">
+              <a:schemeClr val="accent1"/>
+            </a:effectRef>
+            <a:fontRef idx="minor">
+              <a:schemeClr val="lt1"/>
+            </a:fontRef>
+          </p:style>
+          <p:txBody>
+            <a:bodyPr rtlCol="0" anchor="t"/>
+            <a:lstStyle>
+              <a:lvl1pPr marL="0" indent="0">
+                <a:defRPr sz="1100">
+                  <a:solidFill>
+                    <a:schemeClr val="lt1"/>
+                  </a:solidFill>
+                  <a:latin typeface="+mn-lt"/>
+                  <a:ea typeface="+mn-ea"/>
+                  <a:cs typeface="+mn-cs"/>
+                </a:defRPr>
+              </a:lvl1pPr>
+              <a:lvl2pPr marL="457200" indent="0">
+                <a:defRPr sz="1100">
+                  <a:solidFill>
+                    <a:schemeClr val="lt1"/>
+                  </a:solidFill>
+                  <a:latin typeface="+mn-lt"/>
+                  <a:ea typeface="+mn-ea"/>
+                  <a:cs typeface="+mn-cs"/>
+                </a:defRPr>
+              </a:lvl2pPr>
+              <a:lvl3pPr marL="914400" indent="0">
+                <a:defRPr sz="1100">
+                  <a:solidFill>
+                    <a:schemeClr val="lt1"/>
+                  </a:solidFill>
+                  <a:latin typeface="+mn-lt"/>
+                  <a:ea typeface="+mn-ea"/>
+                  <a:cs typeface="+mn-cs"/>
+                </a:defRPr>
+              </a:lvl3pPr>
+              <a:lvl4pPr marL="1371600" indent="0">
+                <a:defRPr sz="1100">
+                  <a:solidFill>
+                    <a:schemeClr val="lt1"/>
+                  </a:solidFill>
+                  <a:latin typeface="+mn-lt"/>
+                  <a:ea typeface="+mn-ea"/>
+                  <a:cs typeface="+mn-cs"/>
+                </a:defRPr>
+              </a:lvl4pPr>
+              <a:lvl5pPr marL="1828800" indent="0">
+                <a:defRPr sz="1100">
+                  <a:solidFill>
+                    <a:schemeClr val="lt1"/>
+                  </a:solidFill>
+                  <a:latin typeface="+mn-lt"/>
+                  <a:ea typeface="+mn-ea"/>
+                  <a:cs typeface="+mn-cs"/>
+                </a:defRPr>
+              </a:lvl5pPr>
+              <a:lvl6pPr marL="2286000" indent="0">
+                <a:defRPr sz="1100">
+                  <a:solidFill>
+                    <a:schemeClr val="lt1"/>
+                  </a:solidFill>
+                  <a:latin typeface="+mn-lt"/>
+                  <a:ea typeface="+mn-ea"/>
+                  <a:cs typeface="+mn-cs"/>
+                </a:defRPr>
+              </a:lvl6pPr>
+              <a:lvl7pPr marL="2743200" indent="0">
+                <a:defRPr sz="1100">
+                  <a:solidFill>
+                    <a:schemeClr val="lt1"/>
+                  </a:solidFill>
+                  <a:latin typeface="+mn-lt"/>
+                  <a:ea typeface="+mn-ea"/>
+                  <a:cs typeface="+mn-cs"/>
+                </a:defRPr>
+              </a:lvl7pPr>
+              <a:lvl8pPr marL="3200400" indent="0">
+                <a:defRPr sz="1100">
+                  <a:solidFill>
+                    <a:schemeClr val="lt1"/>
+                  </a:solidFill>
+                  <a:latin typeface="+mn-lt"/>
+                  <a:ea typeface="+mn-ea"/>
+                  <a:cs typeface="+mn-cs"/>
+                </a:defRPr>
+              </a:lvl8pPr>
+              <a:lvl9pPr marL="3657600" indent="0">
+                <a:defRPr sz="1100">
+                  <a:solidFill>
+                    <a:schemeClr val="lt1"/>
+                  </a:solidFill>
+                  <a:latin typeface="+mn-lt"/>
+                  <a:ea typeface="+mn-ea"/>
+                  <a:cs typeface="+mn-cs"/>
+                </a:defRPr>
+              </a:lvl9pPr>
+            </a:lstStyle>
+            <a:p>
+              <a:pPr algn="l"/>
+              <a:endParaRPr kumimoji="1" lang="ja-JP" altLang="en-US" sz="1100"/>
+            </a:p>
+          </p:txBody>
+        </p:sp>
+        <p:sp>
+          <p:nvSpPr>
+            <p:cNvPr id="10" name="楕円 9">
+              <a:extLst>
+                <a:ext uri="{FF2B5EF4-FFF2-40B4-BE49-F238E27FC236}">
+                  <a16:creationId xmlns:a16="http://schemas.microsoft.com/office/drawing/2014/main" id="{AD304C8F-3BC8-4562-AA7F-7EE511327B12}"/>
+                </a:ext>
+              </a:extLst>
+            </p:cNvPr>
+            <p:cNvSpPr/>
+            <p:nvPr/>
+          </p:nvSpPr>
+          <p:spPr>
+            <a:xfrm>
+              <a:off x="5731222" y="2659108"/>
+              <a:ext cx="339090" cy="303712"/>
+            </a:xfrm>
+            <a:prstGeom prst="ellipse">
+              <a:avLst/>
+            </a:prstGeom>
+            <a:noFill/>
+            <a:ln>
+              <a:solidFill>
+                <a:srgbClr val="FF0000"/>
+              </a:solidFill>
+            </a:ln>
+          </p:spPr>
+          <p:style>
+            <a:lnRef idx="2">
+              <a:schemeClr val="accent1">
+                <a:shade val="15000"/>
+              </a:schemeClr>
+            </a:lnRef>
+            <a:fillRef idx="1">
+              <a:schemeClr val="accent1"/>
+            </a:fillRef>
+            <a:effectRef idx="0">
+              <a:schemeClr val="accent1"/>
+            </a:effectRef>
+            <a:fontRef idx="minor">
+              <a:schemeClr val="lt1"/>
+            </a:fontRef>
+          </p:style>
+          <p:txBody>
+            <a:bodyPr rtlCol="0" anchor="t"/>
+            <a:lstStyle>
+              <a:lvl1pPr marL="0" indent="0">
+                <a:defRPr sz="1100">
+                  <a:solidFill>
+                    <a:schemeClr val="lt1"/>
+                  </a:solidFill>
+                  <a:latin typeface="+mn-lt"/>
+                  <a:ea typeface="+mn-ea"/>
+                  <a:cs typeface="+mn-cs"/>
+                </a:defRPr>
+              </a:lvl1pPr>
+              <a:lvl2pPr marL="457200" indent="0">
+                <a:defRPr sz="1100">
+                  <a:solidFill>
+                    <a:schemeClr val="lt1"/>
+                  </a:solidFill>
+                  <a:latin typeface="+mn-lt"/>
+                  <a:ea typeface="+mn-ea"/>
+                  <a:cs typeface="+mn-cs"/>
+                </a:defRPr>
+              </a:lvl2pPr>
+              <a:lvl3pPr marL="914400" indent="0">
+                <a:defRPr sz="1100">
+                  <a:solidFill>
+                    <a:schemeClr val="lt1"/>
+                  </a:solidFill>
+                  <a:latin typeface="+mn-lt"/>
+                  <a:ea typeface="+mn-ea"/>
+                  <a:cs typeface="+mn-cs"/>
+                </a:defRPr>
+              </a:lvl3pPr>
+              <a:lvl4pPr marL="1371600" indent="0">
+                <a:defRPr sz="1100">
+                  <a:solidFill>
+                    <a:schemeClr val="lt1"/>
+                  </a:solidFill>
+                  <a:latin typeface="+mn-lt"/>
+                  <a:ea typeface="+mn-ea"/>
+                  <a:cs typeface="+mn-cs"/>
+                </a:defRPr>
+              </a:lvl4pPr>
+              <a:lvl5pPr marL="1828800" indent="0">
+                <a:defRPr sz="1100">
+                  <a:solidFill>
+                    <a:schemeClr val="lt1"/>
+                  </a:solidFill>
+                  <a:latin typeface="+mn-lt"/>
+                  <a:ea typeface="+mn-ea"/>
+                  <a:cs typeface="+mn-cs"/>
+                </a:defRPr>
+              </a:lvl5pPr>
+              <a:lvl6pPr marL="2286000" indent="0">
+                <a:defRPr sz="1100">
+                  <a:solidFill>
+                    <a:schemeClr val="lt1"/>
+                  </a:solidFill>
+                  <a:latin typeface="+mn-lt"/>
+                  <a:ea typeface="+mn-ea"/>
+                  <a:cs typeface="+mn-cs"/>
+                </a:defRPr>
+              </a:lvl6pPr>
+              <a:lvl7pPr marL="2743200" indent="0">
+                <a:defRPr sz="1100">
+                  <a:solidFill>
+                    <a:schemeClr val="lt1"/>
+                  </a:solidFill>
+                  <a:latin typeface="+mn-lt"/>
+                  <a:ea typeface="+mn-ea"/>
+                  <a:cs typeface="+mn-cs"/>
+                </a:defRPr>
+              </a:lvl7pPr>
+              <a:lvl8pPr marL="3200400" indent="0">
+                <a:defRPr sz="1100">
+                  <a:solidFill>
+                    <a:schemeClr val="lt1"/>
+                  </a:solidFill>
+                  <a:latin typeface="+mn-lt"/>
+                  <a:ea typeface="+mn-ea"/>
+                  <a:cs typeface="+mn-cs"/>
+                </a:defRPr>
+              </a:lvl8pPr>
+              <a:lvl9pPr marL="3657600" indent="0">
+                <a:defRPr sz="1100">
+                  <a:solidFill>
+                    <a:schemeClr val="lt1"/>
+                  </a:solidFill>
+                  <a:latin typeface="+mn-lt"/>
+                  <a:ea typeface="+mn-ea"/>
+                  <a:cs typeface="+mn-cs"/>
+                </a:defRPr>
+              </a:lvl9pPr>
+            </a:lstStyle>
+            <a:p>
+              <a:pPr algn="l"/>
+              <a:endParaRPr kumimoji="1" lang="ja-JP" altLang="en-US" sz="1100"/>
+            </a:p>
+          </p:txBody>
+        </p:sp>
+        <p:sp>
+          <p:nvSpPr>
+            <p:cNvPr id="11" name="楕円 10">
+              <a:extLst>
+                <a:ext uri="{FF2B5EF4-FFF2-40B4-BE49-F238E27FC236}">
+                  <a16:creationId xmlns:a16="http://schemas.microsoft.com/office/drawing/2014/main" id="{AA467E40-449A-4AB8-B57E-D40E543007E1}"/>
+                </a:ext>
+              </a:extLst>
+            </p:cNvPr>
+            <p:cNvSpPr/>
+            <p:nvPr/>
+          </p:nvSpPr>
+          <p:spPr>
+            <a:xfrm>
+              <a:off x="5426422" y="2838995"/>
+              <a:ext cx="342900" cy="311331"/>
+            </a:xfrm>
+            <a:prstGeom prst="ellipse">
+              <a:avLst/>
+            </a:prstGeom>
+            <a:noFill/>
+            <a:ln>
+              <a:solidFill>
+                <a:srgbClr val="FF0000"/>
+              </a:solidFill>
+            </a:ln>
+          </p:spPr>
+          <p:style>
+            <a:lnRef idx="2">
+              <a:schemeClr val="accent1">
+                <a:shade val="15000"/>
+              </a:schemeClr>
+            </a:lnRef>
+            <a:fillRef idx="1">
+              <a:schemeClr val="accent1"/>
+            </a:fillRef>
+            <a:effectRef idx="0">
+              <a:schemeClr val="accent1"/>
+            </a:effectRef>
+            <a:fontRef idx="minor">
+              <a:schemeClr val="lt1"/>
+            </a:fontRef>
+          </p:style>
+          <p:txBody>
+            <a:bodyPr rtlCol="0" anchor="t"/>
+            <a:lstStyle>
+              <a:lvl1pPr marL="0" indent="0">
+                <a:defRPr sz="1100">
+                  <a:solidFill>
+                    <a:schemeClr val="lt1"/>
+                  </a:solidFill>
+                  <a:latin typeface="+mn-lt"/>
+                  <a:ea typeface="+mn-ea"/>
+                  <a:cs typeface="+mn-cs"/>
+                </a:defRPr>
+              </a:lvl1pPr>
+              <a:lvl2pPr marL="457200" indent="0">
+                <a:defRPr sz="1100">
+                  <a:solidFill>
+                    <a:schemeClr val="lt1"/>
+                  </a:solidFill>
+                  <a:latin typeface="+mn-lt"/>
+                  <a:ea typeface="+mn-ea"/>
+                  <a:cs typeface="+mn-cs"/>
+                </a:defRPr>
+              </a:lvl2pPr>
+              <a:lvl3pPr marL="914400" indent="0">
+                <a:defRPr sz="1100">
+                  <a:solidFill>
+                    <a:schemeClr val="lt1"/>
+                  </a:solidFill>
+                  <a:latin typeface="+mn-lt"/>
+                  <a:ea typeface="+mn-ea"/>
+                  <a:cs typeface="+mn-cs"/>
+                </a:defRPr>
+              </a:lvl3pPr>
+              <a:lvl4pPr marL="1371600" indent="0">
+                <a:defRPr sz="1100">
+                  <a:solidFill>
+                    <a:schemeClr val="lt1"/>
+                  </a:solidFill>
+                  <a:latin typeface="+mn-lt"/>
+                  <a:ea typeface="+mn-ea"/>
+                  <a:cs typeface="+mn-cs"/>
+                </a:defRPr>
+              </a:lvl4pPr>
+              <a:lvl5pPr marL="1828800" indent="0">
+                <a:defRPr sz="1100">
+                  <a:solidFill>
+                    <a:schemeClr val="lt1"/>
+                  </a:solidFill>
+                  <a:latin typeface="+mn-lt"/>
+                  <a:ea typeface="+mn-ea"/>
+                  <a:cs typeface="+mn-cs"/>
+                </a:defRPr>
+              </a:lvl5pPr>
+              <a:lvl6pPr marL="2286000" indent="0">
+                <a:defRPr sz="1100">
+                  <a:solidFill>
+                    <a:schemeClr val="lt1"/>
+                  </a:solidFill>
+                  <a:latin typeface="+mn-lt"/>
+                  <a:ea typeface="+mn-ea"/>
+                  <a:cs typeface="+mn-cs"/>
+                </a:defRPr>
+              </a:lvl6pPr>
+              <a:lvl7pPr marL="2743200" indent="0">
+                <a:defRPr sz="1100">
+                  <a:solidFill>
+                    <a:schemeClr val="lt1"/>
+                  </a:solidFill>
+                  <a:latin typeface="+mn-lt"/>
+                  <a:ea typeface="+mn-ea"/>
+                  <a:cs typeface="+mn-cs"/>
+                </a:defRPr>
+              </a:lvl7pPr>
+              <a:lvl8pPr marL="3200400" indent="0">
+                <a:defRPr sz="1100">
+                  <a:solidFill>
+                    <a:schemeClr val="lt1"/>
+                  </a:solidFill>
+                  <a:latin typeface="+mn-lt"/>
+                  <a:ea typeface="+mn-ea"/>
+                  <a:cs typeface="+mn-cs"/>
+                </a:defRPr>
+              </a:lvl8pPr>
+              <a:lvl9pPr marL="3657600" indent="0">
+                <a:defRPr sz="1100">
+                  <a:solidFill>
+                    <a:schemeClr val="lt1"/>
+                  </a:solidFill>
+                  <a:latin typeface="+mn-lt"/>
+                  <a:ea typeface="+mn-ea"/>
+                  <a:cs typeface="+mn-cs"/>
+                </a:defRPr>
+              </a:lvl9pPr>
+            </a:lstStyle>
+            <a:p>
+              <a:pPr algn="l"/>
+              <a:endParaRPr kumimoji="1" lang="ja-JP" altLang="en-US" sz="1100"/>
+            </a:p>
+          </p:txBody>
+        </p:sp>
+      </p:grpSp>
+      <p:sp>
+        <p:nvSpPr>
+          <p:cNvPr id="13" name="コンテンツ プレースホルダー 2">
+            <a:extLst>
+              <a:ext uri="{FF2B5EF4-FFF2-40B4-BE49-F238E27FC236}">
+                <a16:creationId xmlns:a16="http://schemas.microsoft.com/office/drawing/2014/main" id="{6A50FD89-5C6B-9448-2982-B5C68D14EE2B}"/>
+              </a:ext>
+            </a:extLst>
+          </p:cNvPr>
+          <p:cNvSpPr txBox="1">
+            <a:spLocks/>
+          </p:cNvSpPr>
+          <p:nvPr/>
+        </p:nvSpPr>
+        <p:spPr>
+          <a:xfrm>
+            <a:off x="911424" y="4763522"/>
+            <a:ext cx="10369152" cy="1729351"/>
+          </a:xfrm>
+          <a:prstGeom prst="rect">
+            <a:avLst/>
+          </a:prstGeom>
+        </p:spPr>
+        <p:txBody>
+          <a:bodyPr vert="horz" lIns="91440" tIns="45720" rIns="91440" bIns="45720" rtlCol="0">
+            <a:normAutofit lnSpcReduction="10000"/>
+          </a:bodyPr>
+          <a:lstStyle>
+            <a:lvl1pPr marL="228600" indent="-228600" algn="l" defTabSz="914400" rtl="0" eaLnBrk="1" latinLnBrk="0" hangingPunct="1">
+              <a:lnSpc>
+                <a:spcPct val="90000"/>
+              </a:lnSpc>
+              <a:spcBef>
+                <a:spcPts val="1000"/>
+              </a:spcBef>
+              <a:buFont typeface="Arial" panose="020B0604020202020204" pitchFamily="34" charset="0"/>
+              <a:buChar char="•"/>
+              <a:defRPr kumimoji="1" sz="2800" kern="1200">
+                <a:solidFill>
+                  <a:schemeClr val="tx1"/>
+                </a:solidFill>
+                <a:latin typeface="+mn-lt"/>
+                <a:ea typeface="+mn-ea"/>
+                <a:cs typeface="+mn-cs"/>
+              </a:defRPr>
+            </a:lvl1pPr>
+            <a:lvl2pPr marL="685800" indent="-228600" algn="l" defTabSz="914400" rtl="0" eaLnBrk="1" latinLnBrk="0" hangingPunct="1">
+              <a:lnSpc>
+                <a:spcPct val="90000"/>
+              </a:lnSpc>
+              <a:spcBef>
+                <a:spcPts val="500"/>
+              </a:spcBef>
+              <a:buFont typeface="Arial" panose="020B0604020202020204" pitchFamily="34" charset="0"/>
+              <a:buChar char="•"/>
+              <a:defRPr kumimoji="1" sz="2400" kern="1200">
+                <a:solidFill>
+                  <a:schemeClr val="tx1"/>
+                </a:solidFill>
+                <a:latin typeface="+mn-lt"/>
+                <a:ea typeface="+mn-ea"/>
+                <a:cs typeface="+mn-cs"/>
+              </a:defRPr>
+            </a:lvl2pPr>
+            <a:lvl3pPr marL="1143000" indent="-228600" algn="l" defTabSz="914400" rtl="0" eaLnBrk="1" latinLnBrk="0" hangingPunct="1">
+              <a:lnSpc>
+                <a:spcPct val="90000"/>
+              </a:lnSpc>
+              <a:spcBef>
+                <a:spcPts val="500"/>
+              </a:spcBef>
+              <a:buFont typeface="Arial" panose="020B0604020202020204" pitchFamily="34" charset="0"/>
+              <a:buChar char="•"/>
+              <a:defRPr kumimoji="1" sz="2000" kern="1200">
+                <a:solidFill>
+                  <a:schemeClr val="tx1"/>
+                </a:solidFill>
+                <a:latin typeface="+mn-lt"/>
+                <a:ea typeface="+mn-ea"/>
+                <a:cs typeface="+mn-cs"/>
+              </a:defRPr>
+            </a:lvl3pPr>
+            <a:lvl4pPr marL="1600200" indent="-228600" algn="l" defTabSz="914400" rtl="0" eaLnBrk="1" latinLnBrk="0" hangingPunct="1">
+              <a:lnSpc>
+                <a:spcPct val="90000"/>
+              </a:lnSpc>
+              <a:spcBef>
+                <a:spcPts val="500"/>
+              </a:spcBef>
+              <a:buFont typeface="Arial" panose="020B0604020202020204" pitchFamily="34" charset="0"/>
+              <a:buChar char="•"/>
+              <a:defRPr kumimoji="1" sz="1800" kern="1200">
+                <a:solidFill>
+                  <a:schemeClr val="tx1"/>
+                </a:solidFill>
+                <a:latin typeface="+mn-lt"/>
+                <a:ea typeface="+mn-ea"/>
+                <a:cs typeface="+mn-cs"/>
+              </a:defRPr>
+            </a:lvl4pPr>
+            <a:lvl5pPr marL="2057400" indent="-228600" algn="l" defTabSz="914400" rtl="0" eaLnBrk="1" latinLnBrk="0" hangingPunct="1">
+              <a:lnSpc>
+                <a:spcPct val="90000"/>
+              </a:lnSpc>
+              <a:spcBef>
+                <a:spcPts val="500"/>
+              </a:spcBef>
+              <a:buFont typeface="Arial" panose="020B0604020202020204" pitchFamily="34" charset="0"/>
+              <a:buChar char="•"/>
+              <a:defRPr kumimoji="1" sz="1800" kern="1200">
+                <a:solidFill>
+                  <a:schemeClr val="tx1"/>
+                </a:solidFill>
+                <a:latin typeface="+mn-lt"/>
+                <a:ea typeface="+mn-ea"/>
+                <a:cs typeface="+mn-cs"/>
+              </a:defRPr>
+            </a:lvl5pPr>
+            <a:lvl6pPr marL="2514600" indent="-228600" algn="l" defTabSz="914400" rtl="0" eaLnBrk="1" latinLnBrk="0" hangingPunct="1">
+              <a:lnSpc>
+                <a:spcPct val="90000"/>
+              </a:lnSpc>
+              <a:spcBef>
+                <a:spcPts val="500"/>
+              </a:spcBef>
+              <a:buFont typeface="Arial" panose="020B0604020202020204" pitchFamily="34" charset="0"/>
+              <a:buChar char="•"/>
+              <a:defRPr kumimoji="1" sz="1800" kern="1200">
+                <a:solidFill>
+                  <a:schemeClr val="tx1"/>
+                </a:solidFill>
+                <a:latin typeface="+mn-lt"/>
+                <a:ea typeface="+mn-ea"/>
+                <a:cs typeface="+mn-cs"/>
+              </a:defRPr>
+            </a:lvl6pPr>
+            <a:lvl7pPr marL="2971800" indent="-228600" algn="l" defTabSz="914400" rtl="0" eaLnBrk="1" latinLnBrk="0" hangingPunct="1">
+              <a:lnSpc>
+                <a:spcPct val="90000"/>
+              </a:lnSpc>
+              <a:spcBef>
+                <a:spcPts val="500"/>
+              </a:spcBef>
+              <a:buFont typeface="Arial" panose="020B0604020202020204" pitchFamily="34" charset="0"/>
+              <a:buChar char="•"/>
+              <a:defRPr kumimoji="1" sz="1800" kern="1200">
+                <a:solidFill>
+                  <a:schemeClr val="tx1"/>
+                </a:solidFill>
+                <a:latin typeface="+mn-lt"/>
+                <a:ea typeface="+mn-ea"/>
+                <a:cs typeface="+mn-cs"/>
+              </a:defRPr>
+            </a:lvl7pPr>
+            <a:lvl8pPr marL="3429000" indent="-228600" algn="l" defTabSz="914400" rtl="0" eaLnBrk="1" latinLnBrk="0" hangingPunct="1">
+              <a:lnSpc>
+                <a:spcPct val="90000"/>
+              </a:lnSpc>
+              <a:spcBef>
+                <a:spcPts val="500"/>
+              </a:spcBef>
+              <a:buFont typeface="Arial" panose="020B0604020202020204" pitchFamily="34" charset="0"/>
+              <a:buChar char="•"/>
+              <a:defRPr kumimoji="1" sz="1800" kern="1200">
+                <a:solidFill>
+                  <a:schemeClr val="tx1"/>
+                </a:solidFill>
+                <a:latin typeface="+mn-lt"/>
+                <a:ea typeface="+mn-ea"/>
+                <a:cs typeface="+mn-cs"/>
+              </a:defRPr>
+            </a:lvl8pPr>
+            <a:lvl9pPr marL="3886200" indent="-228600" algn="l" defTabSz="914400" rtl="0" eaLnBrk="1" latinLnBrk="0" hangingPunct="1">
+              <a:lnSpc>
+                <a:spcPct val="90000"/>
+              </a:lnSpc>
+              <a:spcBef>
+                <a:spcPts val="500"/>
+              </a:spcBef>
+              <a:buFont typeface="Arial" panose="020B0604020202020204" pitchFamily="34" charset="0"/>
+              <a:buChar char="•"/>
+              <a:defRPr kumimoji="1" sz="1800" kern="1200">
+                <a:solidFill>
+                  <a:schemeClr val="tx1"/>
+                </a:solidFill>
+                <a:latin typeface="+mn-lt"/>
+                <a:ea typeface="+mn-ea"/>
+                <a:cs typeface="+mn-cs"/>
+              </a:defRPr>
+            </a:lvl9pPr>
+          </a:lstStyle>
+          <a:p>
+            <a:r>
               <a:rPr lang="ja-JP" altLang="en-US" dirty="0"/>
-              <a:t>どんな案件・テーマ・プロジェクトだったか</a:t>
-            </a:r>
-            <a:endParaRPr lang="en-US" altLang="ja-JP" dirty="0"/>
-          </a:p>
-          <a:p>
-            <a:pPr marL="400050" lvl="1" indent="0">
-              <a:buNone/>
-            </a:pPr>
-            <a:r>
-              <a:rPr lang="ja-JP" altLang="en-US" sz="2000" dirty="0"/>
-              <a:t>全員が「あの話ね」とわかる程度で</a:t>
-            </a:r>
-            <a:endParaRPr lang="en-US" altLang="ja-JP" sz="2000" dirty="0"/>
-          </a:p>
-          <a:p>
-            <a:pPr marL="400050" lvl="1" indent="0">
-              <a:buNone/>
-            </a:pPr>
-            <a:endParaRPr lang="en-US" altLang="ja-JP" sz="2000" dirty="0"/>
-          </a:p>
-          <a:p>
-            <a:pPr marL="457200" indent="-457200">
-              <a:buFont typeface="+mj-lt"/>
-              <a:buAutoNum type="arabicPeriod"/>
-            </a:pPr>
+              <a:t>変化への開放性</a:t>
+            </a:r>
+          </a:p>
+          <a:p>
             <a:r>
               <a:rPr lang="ja-JP" altLang="en-US" dirty="0"/>
-              <a:t>選んだ３枚を１枚１枚理由をつけて説明する</a:t>
-            </a:r>
-            <a:endParaRPr lang="en-US" altLang="ja-JP" dirty="0"/>
-          </a:p>
-          <a:p>
-            <a:pPr marL="457200" indent="-457200">
-              <a:buFont typeface="+mj-lt"/>
-              <a:buAutoNum type="arabicPeriod"/>
-            </a:pPr>
-            <a:endParaRPr lang="en-US" altLang="ja-JP" sz="2000" dirty="0"/>
-          </a:p>
-          <a:p>
-            <a:pPr marL="457200" indent="-457200">
-              <a:buFont typeface="+mj-lt"/>
-              <a:buAutoNum type="arabicPeriod"/>
-            </a:pPr>
-            <a:r>
-              <a:rPr lang="ja-JP" altLang="en-US" dirty="0">
-                <a:latin typeface="+mn-ea"/>
-              </a:rPr>
-              <a:t>持ち時間</a:t>
-            </a:r>
-            <a:r>
-              <a:rPr lang="en-US" altLang="ja-JP" dirty="0">
-                <a:latin typeface="+mn-ea"/>
-              </a:rPr>
-              <a:t>3</a:t>
-            </a:r>
-            <a:r>
-              <a:rPr lang="ja-JP" altLang="en-US" dirty="0">
-                <a:latin typeface="+mn-ea"/>
-              </a:rPr>
-              <a:t>分</a:t>
-            </a:r>
-            <a:endParaRPr lang="en-US" altLang="ja-JP" dirty="0">
-              <a:latin typeface="+mn-ea"/>
-            </a:endParaRPr>
-          </a:p>
-          <a:p>
-            <a:pPr marL="0" indent="0">
-              <a:buNone/>
-            </a:pPr>
-            <a:endParaRPr lang="en-US" altLang="ja-JP" sz="2400" dirty="0"/>
-          </a:p>
-          <a:p>
-            <a:pPr marL="914400" lvl="1" indent="-514350">
-              <a:buFont typeface="+mj-lt"/>
-              <a:buAutoNum type="arabicPeriod"/>
-            </a:pPr>
-            <a:endParaRPr lang="en-US" altLang="ja-JP" dirty="0"/>
+              <a:t>自己増進（自己高揚；自己をより良い方向へ成長させ、向上させるための意識的な努力や行動）に価値の重きを追う人といえそう</a:t>
+            </a:r>
           </a:p>
         </p:txBody>
       </p:sp>
     </p:spTree>
+    <p:extLst>
+      <p:ext uri="{BB962C8B-B14F-4D97-AF65-F5344CB8AC3E}">
+        <p14:creationId xmlns:p14="http://schemas.microsoft.com/office/powerpoint/2010/main" val="114931663"/>
+      </p:ext>
+    </p:extLst>
   </p:cSld>
   <p:clrMapOvr>
     <a:masterClrMapping/>
